--- a/content/decks/media-studies/media-studies-s1-lesson-12-the-gaze.pptx
+++ b/content/decks/media-studies/media-studies-s1-lesson-12-the-gaze.pptx
@@ -17,9 +17,10 @@
     <p:sldId id="265" r:id="rId11"/>
     <p:sldId id="266" r:id="rId12"/>
     <p:sldId id="267" r:id="rId13"/>
+    <p:sldId id="268" r:id="rId14"/>
   </p:sldIdLst>
   <p:notesMasterIdLst>
-    <p:notesMasterId r:id="rId14"/>
+    <p:notesMasterId r:id="rId15"/>
   </p:notesMasterIdLst>
   <p:sldSz cx="12192000" cy="6858000"/>
   <p:notesSz cx="6858000" cy="12192000"/>
@@ -513,7 +514,7 @@
           <a:p>
             <a:r>
               <a:rPr lang="en-US" dirty="0"/>
-              <a:t>The block builds van Zoonen and Mulvey; the double stress-tests Mulvey; hooks reframes the whole week.</a:t>
+              <a:t>The block builds van Zoonen and Mulvey; the double stress-tests Mulvey; hooks reframes the whole week. Homework issued Tuesday: the hooks extract, 300 to 400 words, glossed, EN with ZH support, read before Friday.</a:t>
             </a:r>
             <a:endParaRPr lang="en-US" dirty="0"/>
           </a:p>
@@ -601,7 +602,7 @@
           <a:p>
             <a:r>
               <a:rPr lang="en-US" dirty="0"/>
-              <a:t/>
+              <a:t>Swapped 2026-08-24: Manet's Olympia (a nude, against the no-nudes rule, and a July stand-in from the public-domain era) is retired; Cahun is the work the lesson names and the site already shows. The library scan is 1026x1388; shown whole as an image study.</a:t>
             </a:r>
             <a:endParaRPr lang="en-US" dirty="0"/>
           </a:p>
@@ -689,7 +690,7 @@
           <a:p>
             <a:r>
               <a:rPr lang="en-US" dirty="0"/>
-              <a:t/>
+              <a:t>Taught from the read extract (300 to 400 words, glossed, EN with ZH support, issued Tuesday). Daughters of the Dust (1991) is hooks's own screen example if the room wants a text; the reframe then runs on the week's own ads and clips.</a:t>
             </a:r>
             <a:endParaRPr lang="en-US" dirty="0"/>
           </a:p>
@@ -777,7 +778,7 @@
           <a:p>
             <a:r>
               <a:rPr lang="en-US" dirty="0"/>
-              <a:t/>
+              <a:t>CS10 carries the theorist sentence-starters scaffold (ESL): the card is on every desk. The A3 date is hard: Fri 13 Nov to Fri 27 Nov, verified as exactly 14 days, which exceeds the register's one-week notice rule.</a:t>
             </a:r>
             <a:endParaRPr lang="en-US" dirty="0"/>
           </a:p>
@@ -801,6 +802,94 @@
             <a:fld id="{F7021451-1387-4CA6-816F-3879F97B5CBC}" type="slidenum">
               <a:rPr lang="en-US"/>
               <a:t>12</a:t>
+            </a:fld>
+            <a:endParaRPr lang="en-US"/>
+          </a:p>
+        </p:txBody>
+      </p:sp>
+    </p:spTree>
+    <p:extLst>
+      <p:ext uri="{BB962C8B-B14F-4D97-AF65-F5344CB8AC3E}">
+        <p14:creationId xmlns:p14="http://schemas.microsoft.com/office/powerpoint/2010/main" val="1024086991"/>
+      </p:ext>
+    </p:extLst>
+  </p:cSld>
+  <p:clrMapOvr>
+    <a:masterClrMapping/>
+  </p:clrMapOvr>
+</p:notes>
+</file>
+
+<file path=ppt/notesSlides/notesSlide13.xml><?xml version="1.0" encoding="utf-8"?>
+<p:notes xmlns:a="http://schemas.openxmlformats.org/drawingml/2006/main" xmlns:r="http://schemas.openxmlformats.org/officeDocument/2006/relationships" xmlns:p="http://schemas.openxmlformats.org/presentationml/2006/main">
+  <p:cSld>
+    <p:spTree>
+      <p:nvGrpSpPr>
+        <p:cNvPr id="1" name=""/>
+        <p:cNvGrpSpPr/>
+        <p:nvPr/>
+      </p:nvGrpSpPr>
+      <p:grpSpPr>
+        <a:xfrm>
+          <a:off x="0" y="0"/>
+          <a:ext cx="0" cy="0"/>
+          <a:chOff x="0" y="0"/>
+          <a:chExt cx="0" cy="0"/>
+        </a:xfrm>
+      </p:grpSpPr>
+      <p:sp>
+        <p:nvSpPr>
+          <p:cNvPr id="2" name="Slide Image Placeholder 1"/>
+          <p:cNvSpPr>
+            <a:spLocks noGrp="1" noRot="1" noChangeAspect="1"/>
+          </p:cNvSpPr>
+          <p:nvPr>
+            <p:ph type="sldImg"/>
+          </p:nvPr>
+        </p:nvSpPr>
+        <p:spPr/>
+      </p:sp>
+      <p:sp>
+        <p:nvSpPr>
+          <p:cNvPr id="3" name="Notes Placeholder 2"/>
+          <p:cNvSpPr>
+            <a:spLocks noGrp="1"/>
+          </p:cNvSpPr>
+          <p:nvPr>
+            <p:ph type="body" idx="1"/>
+          </p:nvPr>
+        </p:nvSpPr>
+        <p:spPr/>
+        <p:txBody>
+          <a:bodyPr/>
+          <a:lstStyle/>
+          <a:p>
+            <a:r>
+              <a:rPr lang="en-US" dirty="0"/>
+              <a:t/>
+            </a:r>
+            <a:endParaRPr lang="en-US" dirty="0"/>
+          </a:p>
+        </p:txBody>
+      </p:sp>
+      <p:sp>
+        <p:nvSpPr>
+          <p:cNvPr id="4" name="Slide Number Placeholder 3"/>
+          <p:cNvSpPr>
+            <a:spLocks noGrp="1"/>
+          </p:cNvSpPr>
+          <p:nvPr>
+            <p:ph type="sldNum" sz="quarter" idx="10"/>
+          </p:nvPr>
+        </p:nvSpPr>
+        <p:spPr/>
+        <p:txBody>
+          <a:bodyPr/>
+          <a:lstStyle/>
+          <a:p>
+            <a:fld id="{F7021451-1387-4CA6-816F-3879F97B5CBC}" type="slidenum">
+              <a:rPr lang="en-US"/>
+              <a:t>13</a:t>
             </a:fld>
             <a:endParaRPr lang="en-US"/>
           </a:p>
@@ -953,7 +1042,7 @@
           <a:p>
             <a:r>
               <a:rPr lang="en-US" dirty="0"/>
-              <a:t/>
+              <a:t>The D1 starter is one perfume ad and one question: who is this image for? The next slide is the worked pair.</a:t>
             </a:r>
             <a:endParaRPr lang="en-US" dirty="0"/>
           </a:p>
@@ -1041,7 +1130,7 @@
           <a:p>
             <a:r>
               <a:rPr lang="en-US" dirty="0"/>
-              <a:t>The mirror does not add up and the barmaid looks past us. Manet painted the problem the week is about: who looks at whom.</a:t>
+              <a:t>Same house, same product category, two genders sold. Pairs decompose both into the conventions, then swap them on paper: what breaks is the information. One perfume ad opens D1: who is this image for?</a:t>
             </a:r>
             <a:endParaRPr lang="en-US" dirty="0"/>
           </a:p>
@@ -1129,7 +1218,7 @@
           <a:p>
             <a:r>
               <a:rPr lang="en-US" dirty="0"/>
-              <a:t/>
+              <a:t>The mirror does not add up and the barmaid looks past us. Manet painted the problem the week is about: who looks at whom.</a:t>
             </a:r>
             <a:endParaRPr lang="en-US" dirty="0"/>
           </a:p>
@@ -1217,7 +1306,7 @@
           <a:p>
             <a:r>
               <a:rPr lang="en-US" dirty="0"/>
-              <a:t/>
+              <a:t>Hitchcock's Jeff is the three looks in one body: he is the camera, the character, and us. The D2 first test tracks the three looks timecoded on one classical-era clip. Crib: Deck U2.1 slide 6 (Mulvey, Creed, Kuhn).</a:t>
             </a:r>
             <a:endParaRPr lang="en-US" dirty="0"/>
           </a:p>
@@ -1393,7 +1482,7 @@
           <a:p>
             <a:r>
               <a:rPr lang="en-US" dirty="0"/>
-              <a:t/>
+              <a:t>The posters are the slide-safe version of the PROPOSED screened pairs (action sequence, music video, perfume ad; same genre, comparable scene function). Bond is the cleanest single-franchise case: read the two posters' poses, gazes and fragmentation before any clip runs. Sourcing note: Goldfinger was the first choice and is excluded under the no-nudes rule (its key art carries the gold-painted figure in every variant); Dr. No's 007! sheet carries the same reading, clothed.</a:t>
             </a:r>
             <a:endParaRPr lang="en-US" dirty="0"/>
           </a:p>
@@ -1481,7 +1570,7 @@
           <a:p>
             <a:r>
               <a:rPr lang="en-US" dirty="0"/>
-              <a:t>Olympia stares straight back and returns the viewer's look. Use it as the bridge to hooks and the oppositional gaze.</a:t>
+              <a:t/>
             </a:r>
             <a:endParaRPr lang="en-US" dirty="0"/>
           </a:p>
@@ -2066,7 +2155,7 @@
                 <a:ea typeface="Arial" pitchFamily="34" charset="-122"/>
                 <a:cs typeface="Arial" pitchFamily="34" charset="-120"/>
               </a:rPr>
-              <a:t>Four days  ·  Monday 9 to Friday 13 November</a:t>
+              <a:t>Four days  ·  Mon 9 · Tue 10 · Wed 11 (double) · Fri 13 November</a:t>
             </a:r>
             <a:endParaRPr lang="en-US" sz="1300" dirty="0"/>
           </a:p>
@@ -2176,7 +2265,7 @@
                 <a:ea typeface="Arial" pitchFamily="34" charset="-122"/>
                 <a:cs typeface="Arial" pitchFamily="34" charset="-120"/>
               </a:rPr>
-              <a:t>HOOKS · THE OPPOSITIONAL GAZE</a:t>
+              <a:t>A LOOK SENT BACK</a:t>
             </a:r>
             <a:endParaRPr lang="en-US" sz="1100" dirty="0"/>
           </a:p>
@@ -2215,7 +2304,7 @@
                 <a:ea typeface="Arial" pitchFamily="34" charset="-122"/>
                 <a:cs typeface="Arial" pitchFamily="34" charset="-120"/>
               </a:rPr>
-              <a:t>THE WEEK'S QUESTION, FLIPPED</a:t>
+              <a:t>THE IMAGE THAT REFUSES ITS ASSIGNMENT</a:t>
             </a:r>
             <a:endParaRPr lang="en-US" sz="1100" dirty="0"/>
           </a:p>
@@ -2246,123 +2335,21 @@
       </p:sp>
       <p:sp>
         <p:nvSpPr>
-          <p:cNvPr id="5" name="Text 3"/>
-          <p:cNvSpPr/>
-          <p:nvPr/>
-        </p:nvSpPr>
-        <p:spPr>
-          <a:xfrm>
-            <a:off x="822960" y="1280160"/>
-            <a:ext cx="10543032" cy="914400"/>
-          </a:xfrm>
-          <a:prstGeom prst="rect">
-            <a:avLst/>
-          </a:prstGeom>
-          <a:noFill/>
-          <a:ln/>
-        </p:spPr>
-        <p:txBody>
-          <a:bodyPr wrap="square" lIns="0" tIns="0" rIns="0" bIns="0" rtlCol="0" anchor="ctr"/>
-          <a:lstStyle/>
-          <a:p>
-            <a:pPr indent="0" marL="0">
-              <a:buNone/>
-            </a:pPr>
-            <a:r>
-              <a:rPr lang="en-US" sz="3200" dirty="0">
-                <a:solidFill>
-                  <a:srgbClr val="24313F"/>
-                </a:solidFill>
-                <a:latin typeface="Georgia" pitchFamily="34" charset="0"/>
-                <a:ea typeface="Georgia" pitchFamily="34" charset="-122"/>
-                <a:cs typeface="Georgia" pitchFamily="34" charset="-120"/>
-              </a:rPr>
-              <a:t>Looking back at what never expected you</a:t>
-            </a:r>
-            <a:endParaRPr lang="en-US" sz="3200" dirty="0"/>
-          </a:p>
-        </p:txBody>
-      </p:sp>
-      <p:sp>
-        <p:nvSpPr>
-          <p:cNvPr id="6" name="Shape 4"/>
-          <p:cNvSpPr/>
-          <p:nvPr/>
-        </p:nvSpPr>
-        <p:spPr>
-          <a:xfrm>
-            <a:off x="822960" y="2423160"/>
-            <a:ext cx="914400" cy="0"/>
-          </a:xfrm>
-          <a:prstGeom prst="line">
-            <a:avLst/>
-          </a:prstGeom>
-          <a:noFill/>
-          <a:ln w="31750">
-            <a:solidFill>
-              <a:srgbClr val="8C3A38"/>
-            </a:solidFill>
-            <a:prstDash val="solid"/>
-          </a:ln>
-        </p:spPr>
-      </p:sp>
-      <p:sp>
-        <p:nvSpPr>
-          <p:cNvPr id="7" name="Text 5"/>
-          <p:cNvSpPr/>
-          <p:nvPr/>
-        </p:nvSpPr>
-        <p:spPr>
-          <a:xfrm>
-            <a:off x="822960" y="2651760"/>
-            <a:ext cx="9966960" cy="2194560"/>
-          </a:xfrm>
-          <a:prstGeom prst="rect">
-            <a:avLst/>
-          </a:prstGeom>
-          <a:noFill/>
-          <a:ln/>
-        </p:spPr>
-        <p:txBody>
-          <a:bodyPr wrap="square" lIns="0" tIns="0" rIns="0" bIns="0" rtlCol="0" anchor="t"/>
-          <a:lstStyle/>
-          <a:p>
-            <a:pPr indent="0" marL="0">
-              <a:lnSpc>
-                <a:spcPts val="2800"/>
-              </a:lnSpc>
-              <a:buNone/>
-            </a:pPr>
-            <a:r>
-              <a:rPr lang="en-US" sz="2000" dirty="0">
-                <a:solidFill>
-                  <a:srgbClr val="24313F"/>
-                </a:solidFill>
-                <a:latin typeface="Georgia" pitchFamily="34" charset="0"/>
-                <a:ea typeface="Georgia" pitchFamily="34" charset="-122"/>
-                <a:cs typeface="Georgia" pitchFamily="34" charset="-120"/>
-              </a:rPr>
-              <a:t>bell hooks flips the week's question. Not how the text looks at its subjects, but who the looking was built for, and what happens when someone else does it. Refusing a text, and reading it again against itself, is critical work. The oppositional gaze looks back at a text that never expected you to be watching.</a:t>
-            </a:r>
-            <a:endParaRPr lang="en-US" sz="2000" dirty="0"/>
-          </a:p>
-        </p:txBody>
-      </p:sp>
-      <p:sp>
-        <p:nvSpPr>
-          <p:cNvPr id="8" name="Shape 6"/>
-          <p:cNvSpPr/>
-          <p:nvPr/>
-        </p:nvSpPr>
-        <p:spPr>
-          <a:xfrm>
-            <a:off x="822960" y="6382512"/>
-            <a:ext cx="10543032" cy="0"/>
-          </a:xfrm>
-          <a:prstGeom prst="line">
-            <a:avLst/>
-          </a:prstGeom>
-          <a:noFill/>
+          <p:cNvPr id="5" name="Shape 3"/>
+          <p:cNvSpPr/>
+          <p:nvPr/>
+        </p:nvSpPr>
+        <p:spPr>
+          <a:xfrm>
+            <a:off x="822960" y="1097280"/>
+            <a:ext cx="5120640" cy="4754880"/>
+          </a:xfrm>
+          <a:prstGeom prst="rect">
+            <a:avLst/>
+          </a:prstGeom>
+          <a:solidFill>
+            <a:srgbClr val="FAF8F1"/>
+          </a:solidFill>
           <a:ln w="9525">
             <a:solidFill>
               <a:srgbClr val="D9D4C4"/>
@@ -2371,16 +2358,40 @@
           </a:ln>
         </p:spPr>
       </p:sp>
-      <p:sp>
-        <p:nvSpPr>
-          <p:cNvPr id="9" name="Text 7"/>
-          <p:cNvSpPr/>
-          <p:nvPr/>
-        </p:nvSpPr>
-        <p:spPr>
-          <a:xfrm>
-            <a:off x="822960" y="6419088"/>
-            <a:ext cx="7315200" cy="274320"/>
+      <p:pic>
+        <p:nvPicPr>
+          <p:cNvPr id="6" name="Image 0" descr="/Users/dogan/Documents/Vaults/Courses/wiki/classes/media-studies/decks/_build/img/cahun-self.jpg">    </p:cNvPr>
+          <p:cNvPicPr>
+            <a:picLocks noChangeAspect="1"/>
+          </p:cNvPicPr>
+          <p:nvPr/>
+        </p:nvPicPr>
+        <p:blipFill>
+          <a:blip r:embed="rId1"/>
+          <a:stretch>
+            <a:fillRect/>
+          </a:stretch>
+        </p:blipFill>
+        <p:spPr>
+          <a:xfrm>
+            <a:off x="1720521" y="1225296"/>
+            <a:ext cx="3325517" cy="4498848"/>
+          </a:xfrm>
+          <a:prstGeom prst="rect">
+            <a:avLst/>
+          </a:prstGeom>
+        </p:spPr>
+      </p:pic>
+      <p:sp>
+        <p:nvSpPr>
+          <p:cNvPr id="7" name="Text 4"/>
+          <p:cNvSpPr/>
+          <p:nvPr/>
+        </p:nvSpPr>
+        <p:spPr>
+          <a:xfrm>
+            <a:off x="822960" y="5870448"/>
+            <a:ext cx="5120640" cy="274320"/>
           </a:xfrm>
           <a:prstGeom prst="rect">
             <a:avLst/>
@@ -2392,11 +2403,11 @@
           <a:bodyPr wrap="square" lIns="0" tIns="0" rIns="0" bIns="0" rtlCol="0" anchor="ctr"/>
           <a:lstStyle/>
           <a:p>
-            <a:pPr indent="0" marL="0">
-              <a:buNone/>
-            </a:pPr>
-            <a:r>
-              <a:rPr lang="en-US" sz="900" spc="150" kern="0" dirty="0">
+            <a:pPr algn="ctr" indent="0" marL="0">
+              <a:buNone/>
+            </a:pPr>
+            <a:r>
+              <a:rPr lang="en-US" sz="1000" dirty="0">
                 <a:solidFill>
                   <a:srgbClr val="7A7F72"/>
                 </a:solidFill>
@@ -2404,46 +2415,244 @@
                 <a:ea typeface="Arial" pitchFamily="34" charset="-122"/>
                 <a:cs typeface="Arial" pitchFamily="34" charset="-120"/>
               </a:rPr>
-              <a:t>MEDIA STUDIES 9607 · SEMESTER I</a:t>
-            </a:r>
-            <a:endParaRPr lang="en-US" sz="900" dirty="0"/>
-          </a:p>
-        </p:txBody>
-      </p:sp>
-      <p:sp>
-        <p:nvSpPr>
-          <p:cNvPr id="10" name="Text 8"/>
-          <p:cNvSpPr/>
-          <p:nvPr/>
-        </p:nvSpPr>
-        <p:spPr>
-          <a:xfrm>
-            <a:off x="10268712" y="6355080"/>
-            <a:ext cx="1097280" cy="365760"/>
-          </a:xfrm>
-          <a:prstGeom prst="rect">
-            <a:avLst/>
-          </a:prstGeom>
-          <a:noFill/>
-          <a:ln/>
-        </p:spPr>
-        <p:txBody>
-          <a:bodyPr wrap="square" lIns="0" tIns="0" rIns="0" bIns="0" rtlCol="0" anchor="ctr"/>
-          <a:lstStyle/>
-          <a:p>
-            <a:pPr algn="r" indent="0" marL="0">
-              <a:buNone/>
-            </a:pPr>
-            <a:r>
-              <a:rPr lang="en-US" sz="1600" dirty="0">
-                <a:solidFill>
-                  <a:srgbClr val="A3C1AD"/>
+              <a:t>Claude Cahun, Self-Portrait, 1920</a:t>
+            </a:r>
+            <a:endParaRPr lang="en-US" sz="1000" dirty="0"/>
+          </a:p>
+        </p:txBody>
+      </p:sp>
+      <p:sp>
+        <p:nvSpPr>
+          <p:cNvPr id="8" name="Text 5"/>
+          <p:cNvSpPr/>
+          <p:nvPr/>
+        </p:nvSpPr>
+        <p:spPr>
+          <a:xfrm>
+            <a:off x="6309360" y="1280160"/>
+            <a:ext cx="5120640" cy="822960"/>
+          </a:xfrm>
+          <a:prstGeom prst="rect">
+            <a:avLst/>
+          </a:prstGeom>
+          <a:noFill/>
+          <a:ln/>
+        </p:spPr>
+        <p:txBody>
+          <a:bodyPr wrap="square" lIns="0" tIns="0" rIns="0" bIns="0" rtlCol="0" anchor="t"/>
+          <a:lstStyle/>
+          <a:p>
+            <a:pPr indent="0" marL="0">
+              <a:lnSpc>
+                <a:spcPts val="3200"/>
+              </a:lnSpc>
+              <a:buNone/>
+            </a:pPr>
+            <a:r>
+              <a:rPr lang="en-US" sz="2800" dirty="0">
+                <a:solidFill>
+                  <a:srgbClr val="24313F"/>
                 </a:solidFill>
                 <a:latin typeface="Georgia" pitchFamily="34" charset="0"/>
                 <a:ea typeface="Georgia" pitchFamily="34" charset="-122"/>
                 <a:cs typeface="Georgia" pitchFamily="34" charset="-120"/>
               </a:rPr>
-              <a:t>04</a:t>
+              <a:t>Refusing to be only an image</a:t>
+            </a:r>
+            <a:endParaRPr lang="en-US" sz="2800" dirty="0"/>
+          </a:p>
+        </p:txBody>
+      </p:sp>
+      <p:sp>
+        <p:nvSpPr>
+          <p:cNvPr id="9" name="Shape 6"/>
+          <p:cNvSpPr/>
+          <p:nvPr/>
+        </p:nvSpPr>
+        <p:spPr>
+          <a:xfrm>
+            <a:off x="6309360" y="2240280"/>
+            <a:ext cx="5029200" cy="0"/>
+          </a:xfrm>
+          <a:prstGeom prst="line">
+            <a:avLst/>
+          </a:prstGeom>
+          <a:noFill/>
+          <a:ln w="9525">
+            <a:solidFill>
+              <a:srgbClr val="D9D4C4"/>
+            </a:solidFill>
+            <a:prstDash val="solid"/>
+          </a:ln>
+        </p:spPr>
+      </p:sp>
+      <p:sp>
+        <p:nvSpPr>
+          <p:cNvPr id="10" name="Text 7"/>
+          <p:cNvSpPr/>
+          <p:nvPr/>
+        </p:nvSpPr>
+        <p:spPr>
+          <a:xfrm>
+            <a:off x="6309360" y="2423160"/>
+            <a:ext cx="5120640" cy="3566160"/>
+          </a:xfrm>
+          <a:prstGeom prst="rect">
+            <a:avLst/>
+          </a:prstGeom>
+          <a:noFill/>
+          <a:ln/>
+        </p:spPr>
+        <p:txBody>
+          <a:bodyPr wrap="square" lIns="0" tIns="0" rIns="0" bIns="0" rtlCol="0" anchor="t"/>
+          <a:lstStyle/>
+          <a:p>
+            <a:pPr indent="0" marL="0">
+              <a:lnSpc>
+                <a:spcPts val="2200"/>
+              </a:lnSpc>
+              <a:buNone/>
+            </a:pPr>
+            <a:r>
+              <a:rPr lang="en-US" sz="1550" dirty="0">
+                <a:solidFill>
+                  <a:srgbClr val="24313F"/>
+                </a:solidFill>
+                <a:latin typeface="Georgia" pitchFamily="34" charset="0"/>
+                <a:ea typeface="Georgia" pitchFamily="34" charset="-122"/>
+                <a:cs typeface="Georgia" pitchFamily="34" charset="-120"/>
+              </a:rPr>
+              <a:t>Cahun shaves the head, wears the suit, plants a hand on the hip and stares the camera down: every convention of the looked-at woman refused in one frame, a century ago. The portrait does not offer itself; it examines you.</a:t>
+            </a:r>
+            <a:endParaRPr lang="en-US" sz="1550" dirty="0"/>
+          </a:p>
+          <a:p>
+            <a:pPr indent="0" marL="0">
+              <a:lnSpc>
+                <a:spcPts val="2200"/>
+              </a:lnSpc>
+              <a:buNone/>
+            </a:pPr>
+            <a:endParaRPr lang="en-US" sz="1550" dirty="0"/>
+          </a:p>
+          <a:p>
+            <a:pPr indent="0" marL="0">
+              <a:lnSpc>
+                <a:spcPts val="2200"/>
+              </a:lnSpc>
+              <a:buNone/>
+            </a:pPr>
+            <a:r>
+              <a:rPr lang="en-US" sz="1550" dirty="0">
+                <a:solidFill>
+                  <a:srgbClr val="24313F"/>
+                </a:solidFill>
+                <a:latin typeface="Georgia" pitchFamily="34" charset="0"/>
+                <a:ea typeface="Georgia" pitchFamily="34" charset="-122"/>
+                <a:cs typeface="Georgia" pitchFamily="34" charset="-120"/>
+              </a:rPr>
+              <a:t>That stare is the bridge to hooks: the gaze returned by someone the system never expected to look back. Ask of any text this week: who is allowed to look, who is looked at, and what happens when the assignment is refused?</a:t>
+            </a:r>
+            <a:endParaRPr lang="en-US" sz="1550" dirty="0"/>
+          </a:p>
+        </p:txBody>
+      </p:sp>
+      <p:sp>
+        <p:nvSpPr>
+          <p:cNvPr id="11" name="Shape 8"/>
+          <p:cNvSpPr/>
+          <p:nvPr/>
+        </p:nvSpPr>
+        <p:spPr>
+          <a:xfrm>
+            <a:off x="822960" y="6382512"/>
+            <a:ext cx="10543032" cy="0"/>
+          </a:xfrm>
+          <a:prstGeom prst="line">
+            <a:avLst/>
+          </a:prstGeom>
+          <a:noFill/>
+          <a:ln w="9525">
+            <a:solidFill>
+              <a:srgbClr val="D9D4C4"/>
+            </a:solidFill>
+            <a:prstDash val="solid"/>
+          </a:ln>
+        </p:spPr>
+      </p:sp>
+      <p:sp>
+        <p:nvSpPr>
+          <p:cNvPr id="12" name="Text 9"/>
+          <p:cNvSpPr/>
+          <p:nvPr/>
+        </p:nvSpPr>
+        <p:spPr>
+          <a:xfrm>
+            <a:off x="822960" y="6419088"/>
+            <a:ext cx="7315200" cy="274320"/>
+          </a:xfrm>
+          <a:prstGeom prst="rect">
+            <a:avLst/>
+          </a:prstGeom>
+          <a:noFill/>
+          <a:ln/>
+        </p:spPr>
+        <p:txBody>
+          <a:bodyPr wrap="square" lIns="0" tIns="0" rIns="0" bIns="0" rtlCol="0" anchor="ctr"/>
+          <a:lstStyle/>
+          <a:p>
+            <a:pPr indent="0" marL="0">
+              <a:buNone/>
+            </a:pPr>
+            <a:r>
+              <a:rPr lang="en-US" sz="900" spc="150" kern="0" dirty="0">
+                <a:solidFill>
+                  <a:srgbClr val="7A7F72"/>
+                </a:solidFill>
+                <a:latin typeface="Arial" pitchFamily="34" charset="0"/>
+                <a:ea typeface="Arial" pitchFamily="34" charset="-122"/>
+                <a:cs typeface="Arial" pitchFamily="34" charset="-120"/>
+              </a:rPr>
+              <a:t>MEDIA STUDIES 9607 · SEMESTER I</a:t>
+            </a:r>
+            <a:endParaRPr lang="en-US" sz="900" dirty="0"/>
+          </a:p>
+        </p:txBody>
+      </p:sp>
+      <p:sp>
+        <p:nvSpPr>
+          <p:cNvPr id="13" name="Text 10"/>
+          <p:cNvSpPr/>
+          <p:nvPr/>
+        </p:nvSpPr>
+        <p:spPr>
+          <a:xfrm>
+            <a:off x="10268712" y="6355080"/>
+            <a:ext cx="1097280" cy="365760"/>
+          </a:xfrm>
+          <a:prstGeom prst="rect">
+            <a:avLst/>
+          </a:prstGeom>
+          <a:noFill/>
+          <a:ln/>
+        </p:spPr>
+        <p:txBody>
+          <a:bodyPr wrap="square" lIns="0" tIns="0" rIns="0" bIns="0" rtlCol="0" anchor="ctr"/>
+          <a:lstStyle/>
+          <a:p>
+            <a:pPr algn="r" indent="0" marL="0">
+              <a:buNone/>
+            </a:pPr>
+            <a:r>
+              <a:rPr lang="en-US" sz="1600" dirty="0">
+                <a:solidFill>
+                  <a:srgbClr val="A3C1AD"/>
+                </a:solidFill>
+                <a:latin typeface="Georgia" pitchFamily="34" charset="0"/>
+                <a:ea typeface="Georgia" pitchFamily="34" charset="-122"/>
+                <a:cs typeface="Georgia" pitchFamily="34" charset="-120"/>
+              </a:rPr>
+              <a:t>05</a:t>
             </a:r>
             <a:endParaRPr lang="en-US" sz="1600" dirty="0"/>
           </a:p>
@@ -2514,7 +2723,7 @@
                 <a:ea typeface="Arial" pitchFamily="34" charset="-122"/>
                 <a:cs typeface="Arial" pitchFamily="34" charset="-120"/>
               </a:rPr>
-              <a:t>DELIVERABLE · CS10</a:t>
+              <a:t>HOOKS · THE OPPOSITIONAL GAZE</a:t>
             </a:r>
             <a:endParaRPr lang="en-US" sz="1100" dirty="0"/>
           </a:p>
@@ -2553,7 +2762,7 @@
                 <a:ea typeface="Arial" pitchFamily="34" charset="-122"/>
                 <a:cs typeface="Arial" pitchFamily="34" charset="-120"/>
               </a:rPr>
-              <a:t>A THEORIST DOING ANALYTICAL WORK</a:t>
+              <a:t>THE WEEK'S QUESTION, FLIPPED</a:t>
             </a:r>
             <a:endParaRPr lang="en-US" sz="1100" dirty="0"/>
           </a:p>
@@ -2607,7 +2816,7 @@
               <a:buNone/>
             </a:pPr>
             <a:r>
-              <a:rPr lang="en-US" sz="3800" dirty="0">
+              <a:rPr lang="en-US" sz="3200" dirty="0">
                 <a:solidFill>
                   <a:srgbClr val="24313F"/>
                 </a:solidFill>
@@ -2615,9 +2824,9 @@
                 <a:ea typeface="Georgia" pitchFamily="34" charset="-122"/>
                 <a:cs typeface="Georgia" pitchFamily="34" charset="-120"/>
               </a:rPr>
-              <a:t>Not decoration, analysis</a:t>
-            </a:r>
-            <a:endParaRPr lang="en-US" sz="3800" dirty="0"/>
+              <a:t>Looking back at what never expected you</a:t>
+            </a:r>
+            <a:endParaRPr lang="en-US" sz="3200" dirty="0"/>
           </a:p>
         </p:txBody>
       </p:sp>
@@ -2629,7 +2838,7 @@
         </p:nvSpPr>
         <p:spPr>
           <a:xfrm>
-            <a:off x="822960" y="2514600"/>
+            <a:off x="822960" y="2423160"/>
             <a:ext cx="914400" cy="0"/>
           </a:xfrm>
           <a:prstGeom prst="line">
@@ -2652,8 +2861,8 @@
         </p:nvSpPr>
         <p:spPr>
           <a:xfrm>
-            <a:off x="822960" y="2743200"/>
-            <a:ext cx="9875520" cy="1828800"/>
+            <a:off x="822960" y="2651760"/>
+            <a:ext cx="9966960" cy="2194560"/>
           </a:xfrm>
           <a:prstGeom prst="rect">
             <a:avLst/>
@@ -2680,7 +2889,7 @@
                 <a:ea typeface="Georgia" pitchFamily="34" charset="-122"/>
                 <a:cs typeface="Georgia" pitchFamily="34" charset="-120"/>
               </a:rPr>
-              <a:t>One close-reading paragraph on a still or short clip: a claim, evidence, and a theorist working inside the analysis. As Mulvey's camera-look predicts... beats Mulvey said the male gaze. The theorist earns their place by doing work, not by being named.</a:t>
+              <a:t>bell hooks flips the week's question. Not how the text looks at its subjects, but who the looking was built for, and what happens when someone else does it. Refusing a text, and reading it again against itself, is critical work. The oppositional gaze looks back at a text that never expected you to be watching.</a:t>
             </a:r>
             <a:endParaRPr lang="en-US" sz="2000" dirty="0"/>
           </a:p>
@@ -2688,85 +2897,7 @@
       </p:sp>
       <p:sp>
         <p:nvSpPr>
-          <p:cNvPr id="8" name="Text 6"/>
-          <p:cNvSpPr/>
-          <p:nvPr/>
-        </p:nvSpPr>
-        <p:spPr>
-          <a:xfrm>
-            <a:off x="822960" y="4846320"/>
-            <a:ext cx="9875520" cy="365760"/>
-          </a:xfrm>
-          <a:prstGeom prst="rect">
-            <a:avLst/>
-          </a:prstGeom>
-          <a:noFill/>
-          <a:ln/>
-        </p:spPr>
-        <p:txBody>
-          <a:bodyPr wrap="square" lIns="0" tIns="0" rIns="0" bIns="0" rtlCol="0" anchor="ctr"/>
-          <a:lstStyle/>
-          <a:p>
-            <a:pPr indent="0" marL="0">
-              <a:buNone/>
-            </a:pPr>
-            <a:r>
-              <a:rPr lang="en-US" sz="1250" i="1" dirty="0">
-                <a:solidFill>
-                  <a:srgbClr val="7A7F72"/>
-                </a:solidFill>
-                <a:latin typeface="Arial" pitchFamily="34" charset="0"/>
-                <a:ea typeface="Arial" pitchFamily="34" charset="-122"/>
-                <a:cs typeface="Arial" pitchFamily="34" charset="-120"/>
-              </a:rPr>
-              <a:t>Before scripts come in, a Smuggler Hunt: partners hunt for a decorated theorist, named but doing no work.</a:t>
-            </a:r>
-            <a:endParaRPr lang="en-US" sz="1250" dirty="0"/>
-          </a:p>
-        </p:txBody>
-      </p:sp>
-      <p:sp>
-        <p:nvSpPr>
-          <p:cNvPr id="9" name="Text 7"/>
-          <p:cNvSpPr/>
-          <p:nvPr/>
-        </p:nvSpPr>
-        <p:spPr>
-          <a:xfrm>
-            <a:off x="822960" y="5257800"/>
-            <a:ext cx="9875520" cy="457200"/>
-          </a:xfrm>
-          <a:prstGeom prst="rect">
-            <a:avLst/>
-          </a:prstGeom>
-          <a:noFill/>
-          <a:ln/>
-        </p:spPr>
-        <p:txBody>
-          <a:bodyPr wrap="square" lIns="0" tIns="0" rIns="0" bIns="0" rtlCol="0" anchor="ctr"/>
-          <a:lstStyle/>
-          <a:p>
-            <a:pPr indent="0" marL="0">
-              <a:buNone/>
-            </a:pPr>
-            <a:r>
-              <a:rPr lang="en-US" sz="1300" i="1" dirty="0">
-                <a:solidFill>
-                  <a:srgbClr val="7A7F72"/>
-                </a:solidFill>
-                <a:latin typeface="Arial" pitchFamily="34" charset="0"/>
-                <a:ea typeface="Arial" pitchFamily="34" charset="-122"/>
-                <a:cs typeface="Arial" pitchFamily="34" charset="-120"/>
-              </a:rPr>
-              <a:t>A3 announced today: the complete C1 portfolio, due Friday 27 November, exactly 14 days.</a:t>
-            </a:r>
-            <a:endParaRPr lang="en-US" sz="1300" dirty="0"/>
-          </a:p>
-        </p:txBody>
-      </p:sp>
-      <p:sp>
-        <p:nvSpPr>
-          <p:cNvPr id="10" name="Shape 8"/>
+          <p:cNvPr id="8" name="Shape 6"/>
           <p:cNvSpPr/>
           <p:nvPr/>
         </p:nvSpPr>
@@ -2789,7 +2920,7 @@
       </p:sp>
       <p:sp>
         <p:nvSpPr>
-          <p:cNvPr id="11" name="Text 9"/>
+          <p:cNvPr id="9" name="Text 7"/>
           <p:cNvSpPr/>
           <p:nvPr/>
         </p:nvSpPr>
@@ -2828,7 +2959,7 @@
       </p:sp>
       <p:sp>
         <p:nvSpPr>
-          <p:cNvPr id="12" name="Text 10"/>
+          <p:cNvPr id="10" name="Text 8"/>
           <p:cNvSpPr/>
           <p:nvPr/>
         </p:nvSpPr>
@@ -2859,7 +2990,7 @@
                 <a:ea typeface="Georgia" pitchFamily="34" charset="-122"/>
                 <a:cs typeface="Georgia" pitchFamily="34" charset="-120"/>
               </a:rPr>
-              <a:t>05</a:t>
+              <a:t>06</a:t>
             </a:r>
             <a:endParaRPr lang="en-US" sz="1600" dirty="0"/>
           </a:p>
@@ -2876,6 +3007,422 @@
 <file path=ppt/slides/slide12.xml><?xml version="1.0" encoding="utf-8"?>
 <p:sld xmlns:a="http://schemas.openxmlformats.org/drawingml/2006/main" xmlns:r="http://schemas.openxmlformats.org/officeDocument/2006/relationships" xmlns:p="http://schemas.openxmlformats.org/presentationml/2006/main">
   <p:cSld name="Slide 12">
+    <p:bg>
+      <p:bgPr>
+        <a:solidFill>
+          <a:srgbClr val="FAF8F1"/>
+        </a:solidFill>
+      </p:bgPr>
+    </p:bg>
+    <p:spTree>
+      <p:nvGrpSpPr>
+        <p:cNvPr id="1" name=""/>
+        <p:cNvGrpSpPr/>
+        <p:nvPr/>
+      </p:nvGrpSpPr>
+      <p:grpSpPr>
+        <a:xfrm>
+          <a:off x="0" y="0"/>
+          <a:ext cx="0" cy="0"/>
+          <a:chOff x="0" y="0"/>
+          <a:chExt cx="0" cy="0"/>
+        </a:xfrm>
+      </p:grpSpPr>
+      <p:sp>
+        <p:nvSpPr>
+          <p:cNvPr id="2" name="Text 0"/>
+          <p:cNvSpPr/>
+          <p:nvPr/>
+        </p:nvSpPr>
+        <p:spPr>
+          <a:xfrm>
+            <a:off x="822960" y="457200"/>
+            <a:ext cx="6400800" cy="274320"/>
+          </a:xfrm>
+          <a:prstGeom prst="rect">
+            <a:avLst/>
+          </a:prstGeom>
+          <a:noFill/>
+          <a:ln/>
+        </p:spPr>
+        <p:txBody>
+          <a:bodyPr wrap="square" lIns="0" tIns="0" rIns="0" bIns="0" rtlCol="0" anchor="ctr"/>
+          <a:lstStyle/>
+          <a:p>
+            <a:pPr algn="l" indent="0" marL="0">
+              <a:buNone/>
+            </a:pPr>
+            <a:r>
+              <a:rPr lang="en-US" sz="1100" b="1" spc="250" kern="0" dirty="0">
+                <a:solidFill>
+                  <a:srgbClr val="4A6B5D"/>
+                </a:solidFill>
+                <a:latin typeface="Arial" pitchFamily="34" charset="0"/>
+                <a:ea typeface="Arial" pitchFamily="34" charset="-122"/>
+                <a:cs typeface="Arial" pitchFamily="34" charset="-120"/>
+              </a:rPr>
+              <a:t>DELIVERABLE · CS10</a:t>
+            </a:r>
+            <a:endParaRPr lang="en-US" sz="1100" dirty="0"/>
+          </a:p>
+        </p:txBody>
+      </p:sp>
+      <p:sp>
+        <p:nvSpPr>
+          <p:cNvPr id="3" name="Text 1"/>
+          <p:cNvSpPr/>
+          <p:nvPr/>
+        </p:nvSpPr>
+        <p:spPr>
+          <a:xfrm>
+            <a:off x="6793992" y="457200"/>
+            <a:ext cx="4572000" cy="274320"/>
+          </a:xfrm>
+          <a:prstGeom prst="rect">
+            <a:avLst/>
+          </a:prstGeom>
+          <a:noFill/>
+          <a:ln/>
+        </p:spPr>
+        <p:txBody>
+          <a:bodyPr wrap="square" lIns="0" tIns="0" rIns="0" bIns="0" rtlCol="0" anchor="ctr"/>
+          <a:lstStyle/>
+          <a:p>
+            <a:pPr algn="r" indent="0" marL="0">
+              <a:buNone/>
+            </a:pPr>
+            <a:r>
+              <a:rPr lang="en-US" sz="1100" b="1" spc="250" kern="0" dirty="0">
+                <a:solidFill>
+                  <a:srgbClr val="7A7F72"/>
+                </a:solidFill>
+                <a:latin typeface="Arial" pitchFamily="34" charset="0"/>
+                <a:ea typeface="Arial" pitchFamily="34" charset="-122"/>
+                <a:cs typeface="Arial" pitchFamily="34" charset="-120"/>
+              </a:rPr>
+              <a:t>A THEORIST DOING ANALYTICAL WORK</a:t>
+            </a:r>
+            <a:endParaRPr lang="en-US" sz="1100" dirty="0"/>
+          </a:p>
+        </p:txBody>
+      </p:sp>
+      <p:sp>
+        <p:nvSpPr>
+          <p:cNvPr id="4" name="Shape 2"/>
+          <p:cNvSpPr/>
+          <p:nvPr/>
+        </p:nvSpPr>
+        <p:spPr>
+          <a:xfrm>
+            <a:off x="822960" y="786384"/>
+            <a:ext cx="10543032" cy="0"/>
+          </a:xfrm>
+          <a:prstGeom prst="line">
+            <a:avLst/>
+          </a:prstGeom>
+          <a:noFill/>
+          <a:ln w="9525">
+            <a:solidFill>
+              <a:srgbClr val="D9D4C4"/>
+            </a:solidFill>
+            <a:prstDash val="solid"/>
+          </a:ln>
+        </p:spPr>
+      </p:sp>
+      <p:sp>
+        <p:nvSpPr>
+          <p:cNvPr id="5" name="Text 3"/>
+          <p:cNvSpPr/>
+          <p:nvPr/>
+        </p:nvSpPr>
+        <p:spPr>
+          <a:xfrm>
+            <a:off x="822960" y="1280160"/>
+            <a:ext cx="10543032" cy="914400"/>
+          </a:xfrm>
+          <a:prstGeom prst="rect">
+            <a:avLst/>
+          </a:prstGeom>
+          <a:noFill/>
+          <a:ln/>
+        </p:spPr>
+        <p:txBody>
+          <a:bodyPr wrap="square" lIns="0" tIns="0" rIns="0" bIns="0" rtlCol="0" anchor="ctr"/>
+          <a:lstStyle/>
+          <a:p>
+            <a:pPr indent="0" marL="0">
+              <a:buNone/>
+            </a:pPr>
+            <a:r>
+              <a:rPr lang="en-US" sz="3800" dirty="0">
+                <a:solidFill>
+                  <a:srgbClr val="24313F"/>
+                </a:solidFill>
+                <a:latin typeface="Georgia" pitchFamily="34" charset="0"/>
+                <a:ea typeface="Georgia" pitchFamily="34" charset="-122"/>
+                <a:cs typeface="Georgia" pitchFamily="34" charset="-120"/>
+              </a:rPr>
+              <a:t>Not decoration, analysis</a:t>
+            </a:r>
+            <a:endParaRPr lang="en-US" sz="3800" dirty="0"/>
+          </a:p>
+        </p:txBody>
+      </p:sp>
+      <p:sp>
+        <p:nvSpPr>
+          <p:cNvPr id="6" name="Shape 4"/>
+          <p:cNvSpPr/>
+          <p:nvPr/>
+        </p:nvSpPr>
+        <p:spPr>
+          <a:xfrm>
+            <a:off x="822960" y="2514600"/>
+            <a:ext cx="914400" cy="0"/>
+          </a:xfrm>
+          <a:prstGeom prst="line">
+            <a:avLst/>
+          </a:prstGeom>
+          <a:noFill/>
+          <a:ln w="31750">
+            <a:solidFill>
+              <a:srgbClr val="8C3A38"/>
+            </a:solidFill>
+            <a:prstDash val="solid"/>
+          </a:ln>
+        </p:spPr>
+      </p:sp>
+      <p:sp>
+        <p:nvSpPr>
+          <p:cNvPr id="7" name="Text 5"/>
+          <p:cNvSpPr/>
+          <p:nvPr/>
+        </p:nvSpPr>
+        <p:spPr>
+          <a:xfrm>
+            <a:off x="822960" y="2743200"/>
+            <a:ext cx="9875520" cy="1828800"/>
+          </a:xfrm>
+          <a:prstGeom prst="rect">
+            <a:avLst/>
+          </a:prstGeom>
+          <a:noFill/>
+          <a:ln/>
+        </p:spPr>
+        <p:txBody>
+          <a:bodyPr wrap="square" lIns="0" tIns="0" rIns="0" bIns="0" rtlCol="0" anchor="t"/>
+          <a:lstStyle/>
+          <a:p>
+            <a:pPr indent="0" marL="0">
+              <a:lnSpc>
+                <a:spcPts val="2800"/>
+              </a:lnSpc>
+              <a:buNone/>
+            </a:pPr>
+            <a:r>
+              <a:rPr lang="en-US" sz="2000" dirty="0">
+                <a:solidFill>
+                  <a:srgbClr val="24313F"/>
+                </a:solidFill>
+                <a:latin typeface="Georgia" pitchFamily="34" charset="0"/>
+                <a:ea typeface="Georgia" pitchFamily="34" charset="-122"/>
+                <a:cs typeface="Georgia" pitchFamily="34" charset="-120"/>
+              </a:rPr>
+              <a:t>One close-reading paragraph on a still or short clip: a claim, evidence, and a theorist working inside the analysis. As Mulvey's camera-look predicts... beats Mulvey said the male gaze. The theorist earns their place by doing work, not by being named.</a:t>
+            </a:r>
+            <a:endParaRPr lang="en-US" sz="2000" dirty="0"/>
+          </a:p>
+        </p:txBody>
+      </p:sp>
+      <p:sp>
+        <p:nvSpPr>
+          <p:cNvPr id="8" name="Text 6"/>
+          <p:cNvSpPr/>
+          <p:nvPr/>
+        </p:nvSpPr>
+        <p:spPr>
+          <a:xfrm>
+            <a:off x="822960" y="4846320"/>
+            <a:ext cx="9875520" cy="365760"/>
+          </a:xfrm>
+          <a:prstGeom prst="rect">
+            <a:avLst/>
+          </a:prstGeom>
+          <a:noFill/>
+          <a:ln/>
+        </p:spPr>
+        <p:txBody>
+          <a:bodyPr wrap="square" lIns="0" tIns="0" rIns="0" bIns="0" rtlCol="0" anchor="ctr"/>
+          <a:lstStyle/>
+          <a:p>
+            <a:pPr indent="0" marL="0">
+              <a:buNone/>
+            </a:pPr>
+            <a:r>
+              <a:rPr lang="en-US" sz="1250" i="1" dirty="0">
+                <a:solidFill>
+                  <a:srgbClr val="7A7F72"/>
+                </a:solidFill>
+                <a:latin typeface="Arial" pitchFamily="34" charset="0"/>
+                <a:ea typeface="Arial" pitchFamily="34" charset="-122"/>
+                <a:cs typeface="Arial" pitchFamily="34" charset="-120"/>
+              </a:rPr>
+              <a:t>Before scripts come in, a Smuggler Hunt: partners hunt for a decorated theorist, named but doing no work.</a:t>
+            </a:r>
+            <a:endParaRPr lang="en-US" sz="1250" dirty="0"/>
+          </a:p>
+        </p:txBody>
+      </p:sp>
+      <p:sp>
+        <p:nvSpPr>
+          <p:cNvPr id="9" name="Text 7"/>
+          <p:cNvSpPr/>
+          <p:nvPr/>
+        </p:nvSpPr>
+        <p:spPr>
+          <a:xfrm>
+            <a:off x="822960" y="5257800"/>
+            <a:ext cx="9875520" cy="457200"/>
+          </a:xfrm>
+          <a:prstGeom prst="rect">
+            <a:avLst/>
+          </a:prstGeom>
+          <a:noFill/>
+          <a:ln/>
+        </p:spPr>
+        <p:txBody>
+          <a:bodyPr wrap="square" lIns="0" tIns="0" rIns="0" bIns="0" rtlCol="0" anchor="ctr"/>
+          <a:lstStyle/>
+          <a:p>
+            <a:pPr indent="0" marL="0">
+              <a:buNone/>
+            </a:pPr>
+            <a:r>
+              <a:rPr lang="en-US" sz="1300" i="1" dirty="0">
+                <a:solidFill>
+                  <a:srgbClr val="7A7F72"/>
+                </a:solidFill>
+                <a:latin typeface="Arial" pitchFamily="34" charset="0"/>
+                <a:ea typeface="Arial" pitchFamily="34" charset="-122"/>
+                <a:cs typeface="Arial" pitchFamily="34" charset="-120"/>
+              </a:rPr>
+              <a:t>A3 announced today: the complete C1 portfolio, due Friday 27 November, exactly 14 days.</a:t>
+            </a:r>
+            <a:endParaRPr lang="en-US" sz="1300" dirty="0"/>
+          </a:p>
+        </p:txBody>
+      </p:sp>
+      <p:sp>
+        <p:nvSpPr>
+          <p:cNvPr id="10" name="Shape 8"/>
+          <p:cNvSpPr/>
+          <p:nvPr/>
+        </p:nvSpPr>
+        <p:spPr>
+          <a:xfrm>
+            <a:off x="822960" y="6382512"/>
+            <a:ext cx="10543032" cy="0"/>
+          </a:xfrm>
+          <a:prstGeom prst="line">
+            <a:avLst/>
+          </a:prstGeom>
+          <a:noFill/>
+          <a:ln w="9525">
+            <a:solidFill>
+              <a:srgbClr val="D9D4C4"/>
+            </a:solidFill>
+            <a:prstDash val="solid"/>
+          </a:ln>
+        </p:spPr>
+      </p:sp>
+      <p:sp>
+        <p:nvSpPr>
+          <p:cNvPr id="11" name="Text 9"/>
+          <p:cNvSpPr/>
+          <p:nvPr/>
+        </p:nvSpPr>
+        <p:spPr>
+          <a:xfrm>
+            <a:off x="822960" y="6419088"/>
+            <a:ext cx="7315200" cy="274320"/>
+          </a:xfrm>
+          <a:prstGeom prst="rect">
+            <a:avLst/>
+          </a:prstGeom>
+          <a:noFill/>
+          <a:ln/>
+        </p:spPr>
+        <p:txBody>
+          <a:bodyPr wrap="square" lIns="0" tIns="0" rIns="0" bIns="0" rtlCol="0" anchor="ctr"/>
+          <a:lstStyle/>
+          <a:p>
+            <a:pPr indent="0" marL="0">
+              <a:buNone/>
+            </a:pPr>
+            <a:r>
+              <a:rPr lang="en-US" sz="900" spc="150" kern="0" dirty="0">
+                <a:solidFill>
+                  <a:srgbClr val="7A7F72"/>
+                </a:solidFill>
+                <a:latin typeface="Arial" pitchFamily="34" charset="0"/>
+                <a:ea typeface="Arial" pitchFamily="34" charset="-122"/>
+                <a:cs typeface="Arial" pitchFamily="34" charset="-120"/>
+              </a:rPr>
+              <a:t>MEDIA STUDIES 9607 · SEMESTER I</a:t>
+            </a:r>
+            <a:endParaRPr lang="en-US" sz="900" dirty="0"/>
+          </a:p>
+        </p:txBody>
+      </p:sp>
+      <p:sp>
+        <p:nvSpPr>
+          <p:cNvPr id="12" name="Text 10"/>
+          <p:cNvSpPr/>
+          <p:nvPr/>
+        </p:nvSpPr>
+        <p:spPr>
+          <a:xfrm>
+            <a:off x="10268712" y="6355080"/>
+            <a:ext cx="1097280" cy="365760"/>
+          </a:xfrm>
+          <a:prstGeom prst="rect">
+            <a:avLst/>
+          </a:prstGeom>
+          <a:noFill/>
+          <a:ln/>
+        </p:spPr>
+        <p:txBody>
+          <a:bodyPr wrap="square" lIns="0" tIns="0" rIns="0" bIns="0" rtlCol="0" anchor="ctr"/>
+          <a:lstStyle/>
+          <a:p>
+            <a:pPr algn="r" indent="0" marL="0">
+              <a:buNone/>
+            </a:pPr>
+            <a:r>
+              <a:rPr lang="en-US" sz="1600" dirty="0">
+                <a:solidFill>
+                  <a:srgbClr val="A3C1AD"/>
+                </a:solidFill>
+                <a:latin typeface="Georgia" pitchFamily="34" charset="0"/>
+                <a:ea typeface="Georgia" pitchFamily="34" charset="-122"/>
+                <a:cs typeface="Georgia" pitchFamily="34" charset="-120"/>
+              </a:rPr>
+              <a:t>07</a:t>
+            </a:r>
+            <a:endParaRPr lang="en-US" sz="1600" dirty="0"/>
+          </a:p>
+        </p:txBody>
+      </p:sp>
+    </p:spTree>
+  </p:cSld>
+  <p:clrMapOvr>
+    <a:masterClrMapping/>
+  </p:clrMapOvr>
+</p:sld>
+</file>
+
+<file path=ppt/slides/slide13.xml><?xml version="1.0" encoding="utf-8"?>
+<p:sld xmlns:a="http://schemas.openxmlformats.org/drawingml/2006/main" xmlns:r="http://schemas.openxmlformats.org/officeDocument/2006/relationships" xmlns:p="http://schemas.openxmlformats.org/presentationml/2006/main">
+  <p:cSld name="Slide 13">
     <p:bg>
       <p:bgPr>
         <a:solidFill>
@@ -3155,7 +3702,7 @@
                 <a:ea typeface="Georgia" pitchFamily="34" charset="-122"/>
                 <a:cs typeface="Georgia" pitchFamily="34" charset="-120"/>
               </a:rPr>
-              <a:t>06</a:t>
+              <a:t>08</a:t>
             </a:r>
             <a:endParaRPr lang="en-US" sz="1600" dirty="0"/>
           </a:p>
@@ -4160,238 +4707,6 @@
 <file path=ppt/slides/slide4.xml><?xml version="1.0" encoding="utf-8"?>
 <p:sld xmlns:a="http://schemas.openxmlformats.org/drawingml/2006/main" xmlns:r="http://schemas.openxmlformats.org/officeDocument/2006/relationships" xmlns:p="http://schemas.openxmlformats.org/presentationml/2006/main">
   <p:cSld name="Slide 4">
-    <p:spTree>
-      <p:nvGrpSpPr>
-        <p:cNvPr id="1" name=""/>
-        <p:cNvGrpSpPr/>
-        <p:nvPr/>
-      </p:nvGrpSpPr>
-      <p:grpSpPr>
-        <a:xfrm>
-          <a:off x="0" y="0"/>
-          <a:ext cx="0" cy="0"/>
-          <a:chOff x="0" y="0"/>
-          <a:chExt cx="0" cy="0"/>
-        </a:xfrm>
-      </p:grpSpPr>
-      <p:pic>
-        <p:nvPicPr>
-          <p:cNvPr id="2" name="Image 0" descr="/Users/dogan/Documents/Vaults/Courses/wiki/classes/media-studies/decks/_build/img/crops/manet-folies_a1777.jpg">    </p:cNvPr>
-          <p:cNvPicPr>
-            <a:picLocks noChangeAspect="1"/>
-          </p:cNvPicPr>
-          <p:nvPr/>
-        </p:nvPicPr>
-        <p:blipFill>
-          <a:blip r:embed="rId1"/>
-          <a:stretch>
-            <a:fillRect/>
-          </a:stretch>
-        </p:blipFill>
-        <p:spPr>
-          <a:xfrm>
-            <a:off x="0" y="0"/>
-            <a:ext cx="12188952" cy="6858000"/>
-          </a:xfrm>
-          <a:prstGeom prst="rect">
-            <a:avLst/>
-          </a:prstGeom>
-        </p:spPr>
-      </p:pic>
-      <p:sp>
-        <p:nvSpPr>
-          <p:cNvPr id="3" name="Shape 0"/>
-          <p:cNvSpPr/>
-          <p:nvPr/>
-        </p:nvSpPr>
-        <p:spPr>
-          <a:xfrm>
-            <a:off x="502920" y="502920"/>
-            <a:ext cx="5120640" cy="502920"/>
-          </a:xfrm>
-          <a:prstGeom prst="rect">
-            <a:avLst/>
-          </a:prstGeom>
-          <a:solidFill>
-            <a:srgbClr val="FAF8F1"/>
-          </a:solidFill>
-          <a:ln/>
-        </p:spPr>
-      </p:sp>
-      <p:sp>
-        <p:nvSpPr>
-          <p:cNvPr id="4" name="Text 1"/>
-          <p:cNvSpPr/>
-          <p:nvPr/>
-        </p:nvSpPr>
-        <p:spPr>
-          <a:xfrm>
-            <a:off x="704088" y="521208"/>
-            <a:ext cx="4846320" cy="274320"/>
-          </a:xfrm>
-          <a:prstGeom prst="rect">
-            <a:avLst/>
-          </a:prstGeom>
-          <a:noFill/>
-          <a:ln/>
-        </p:spPr>
-        <p:txBody>
-          <a:bodyPr wrap="square" lIns="0" tIns="0" rIns="0" bIns="0" rtlCol="0" anchor="ctr"/>
-          <a:lstStyle/>
-          <a:p>
-            <a:pPr algn="l" indent="0" marL="0">
-              <a:buNone/>
-            </a:pPr>
-            <a:r>
-              <a:rPr lang="en-US" sz="1100" b="1" spc="250" kern="0" dirty="0">
-                <a:solidFill>
-                  <a:srgbClr val="4A6B5D"/>
-                </a:solidFill>
-                <a:latin typeface="Arial" pitchFamily="34" charset="0"/>
-                <a:ea typeface="Arial" pitchFamily="34" charset="-122"/>
-                <a:cs typeface="Arial" pitchFamily="34" charset="-120"/>
-              </a:rPr>
-              <a:t>THE LOOKING THAT WILL NOT RESOLVE</a:t>
-            </a:r>
-            <a:endParaRPr lang="en-US" sz="1100" dirty="0"/>
-          </a:p>
-        </p:txBody>
-      </p:sp>
-      <p:sp>
-        <p:nvSpPr>
-          <p:cNvPr id="5" name="Shape 2"/>
-          <p:cNvSpPr/>
-          <p:nvPr/>
-        </p:nvSpPr>
-        <p:spPr>
-          <a:xfrm>
-            <a:off x="457200" y="5230368"/>
-            <a:ext cx="8778240" cy="1243584"/>
-          </a:xfrm>
-          <a:prstGeom prst="rect">
-            <a:avLst/>
-          </a:prstGeom>
-          <a:solidFill>
-            <a:srgbClr val="FAF8F1"/>
-          </a:solidFill>
-          <a:ln/>
-        </p:spPr>
-      </p:sp>
-      <p:sp>
-        <p:nvSpPr>
-          <p:cNvPr id="6" name="Shape 3"/>
-          <p:cNvSpPr/>
-          <p:nvPr/>
-        </p:nvSpPr>
-        <p:spPr>
-          <a:xfrm>
-            <a:off x="676656" y="5468112"/>
-            <a:ext cx="731520" cy="0"/>
-          </a:xfrm>
-          <a:prstGeom prst="line">
-            <a:avLst/>
-          </a:prstGeom>
-          <a:noFill/>
-          <a:ln w="28575">
-            <a:solidFill>
-              <a:srgbClr val="8C3A38"/>
-            </a:solidFill>
-            <a:prstDash val="solid"/>
-          </a:ln>
-        </p:spPr>
-      </p:sp>
-      <p:sp>
-        <p:nvSpPr>
-          <p:cNvPr id="7" name="Text 4"/>
-          <p:cNvSpPr/>
-          <p:nvPr/>
-        </p:nvSpPr>
-        <p:spPr>
-          <a:xfrm>
-            <a:off x="676656" y="5541264"/>
-            <a:ext cx="8339328" cy="585216"/>
-          </a:xfrm>
-          <a:prstGeom prst="rect">
-            <a:avLst/>
-          </a:prstGeom>
-          <a:noFill/>
-          <a:ln/>
-        </p:spPr>
-        <p:txBody>
-          <a:bodyPr wrap="square" lIns="0" tIns="0" rIns="0" bIns="0" rtlCol="0" anchor="t"/>
-          <a:lstStyle/>
-          <a:p>
-            <a:pPr indent="0" marL="0">
-              <a:lnSpc>
-                <a:spcPts val="2200"/>
-              </a:lnSpc>
-              <a:buNone/>
-            </a:pPr>
-            <a:r>
-              <a:rPr lang="en-US" sz="1800" dirty="0">
-                <a:solidFill>
-                  <a:srgbClr val="24313F"/>
-                </a:solidFill>
-                <a:latin typeface="Georgia" pitchFamily="34" charset="0"/>
-                <a:ea typeface="Georgia" pitchFamily="34" charset="-122"/>
-                <a:cs typeface="Georgia" pitchFamily="34" charset="-120"/>
-              </a:rPr>
-              <a:t>The mirror behind her does not add up. Who is she looking at, and who is looking at her?</a:t>
-            </a:r>
-            <a:endParaRPr lang="en-US" sz="1800" dirty="0"/>
-          </a:p>
-        </p:txBody>
-      </p:sp>
-      <p:sp>
-        <p:nvSpPr>
-          <p:cNvPr id="8" name="Text 5"/>
-          <p:cNvSpPr/>
-          <p:nvPr/>
-        </p:nvSpPr>
-        <p:spPr>
-          <a:xfrm>
-            <a:off x="676656" y="6181344"/>
-            <a:ext cx="8339328" cy="256032"/>
-          </a:xfrm>
-          <a:prstGeom prst="rect">
-            <a:avLst/>
-          </a:prstGeom>
-          <a:noFill/>
-          <a:ln/>
-        </p:spPr>
-        <p:txBody>
-          <a:bodyPr wrap="square" lIns="0" tIns="0" rIns="0" bIns="0" rtlCol="0" anchor="ctr"/>
-          <a:lstStyle/>
-          <a:p>
-            <a:pPr indent="0" marL="0">
-              <a:buNone/>
-            </a:pPr>
-            <a:r>
-              <a:rPr lang="en-US" sz="950" spc="50" kern="0" dirty="0">
-                <a:solidFill>
-                  <a:srgbClr val="7A7F72"/>
-                </a:solidFill>
-                <a:latin typeface="Arial" pitchFamily="34" charset="0"/>
-                <a:ea typeface="Arial" pitchFamily="34" charset="-122"/>
-                <a:cs typeface="Arial" pitchFamily="34" charset="-120"/>
-              </a:rPr>
-              <a:t>Edouard Manet, A Bar at the Folies-Bergere, 1882</a:t>
-            </a:r>
-            <a:endParaRPr lang="en-US" sz="950" dirty="0"/>
-          </a:p>
-        </p:txBody>
-      </p:sp>
-    </p:spTree>
-  </p:cSld>
-  <p:clrMapOvr>
-    <a:masterClrMapping/>
-  </p:clrMapOvr>
-</p:sld>
-</file>
-
-<file path=ppt/slides/slide5.xml><?xml version="1.0" encoding="utf-8"?>
-<p:sld xmlns:a="http://schemas.openxmlformats.org/drawingml/2006/main" xmlns:r="http://schemas.openxmlformats.org/officeDocument/2006/relationships" xmlns:p="http://schemas.openxmlformats.org/presentationml/2006/main">
-  <p:cSld name="Slide 5">
     <p:bg>
       <p:bgPr>
         <a:solidFill>
@@ -4446,7 +4761,7 @@
                 <a:ea typeface="Arial" pitchFamily="34" charset="-122"/>
                 <a:cs typeface="Arial" pitchFamily="34" charset="-120"/>
               </a:rPr>
-              <a:t>MULVEY · A CLAIM FROM 1975</a:t>
+              <a:t>TWO ADS, ONE HOUSE</a:t>
             </a:r>
             <a:endParaRPr lang="en-US" sz="1100" dirty="0"/>
           </a:p>
@@ -4485,7 +4800,7 @@
                 <a:ea typeface="Arial" pitchFamily="34" charset="-122"/>
                 <a:cs typeface="Arial" pitchFamily="34" charset="-120"/>
               </a:rPr>
-              <a:t>MADE TO BE TESTED</a:t>
+              <a:t>READ THE FOUR CONVENTIONS ACROSS BOTH</a:t>
             </a:r>
             <a:endParaRPr lang="en-US" sz="1100" dirty="0"/>
           </a:p>
@@ -4516,136 +4831,21 @@
       </p:sp>
       <p:sp>
         <p:nvSpPr>
-          <p:cNvPr id="5" name="Text 3"/>
-          <p:cNvSpPr/>
-          <p:nvPr/>
-        </p:nvSpPr>
-        <p:spPr>
-          <a:xfrm>
-            <a:off x="822960" y="1005840"/>
-            <a:ext cx="10543032" cy="731520"/>
-          </a:xfrm>
-          <a:prstGeom prst="rect">
-            <a:avLst/>
-          </a:prstGeom>
-          <a:noFill/>
-          <a:ln/>
-        </p:spPr>
-        <p:txBody>
-          <a:bodyPr wrap="square" lIns="0" tIns="0" rIns="0" bIns="0" rtlCol="0" anchor="ctr"/>
-          <a:lstStyle/>
-          <a:p>
-            <a:pPr indent="0" marL="0">
-              <a:buNone/>
-            </a:pPr>
-            <a:r>
-              <a:rPr lang="en-US" sz="3400" dirty="0">
-                <a:solidFill>
-                  <a:srgbClr val="24313F"/>
-                </a:solidFill>
-                <a:latin typeface="Georgia" pitchFamily="34" charset="0"/>
-                <a:ea typeface="Georgia" pitchFamily="34" charset="-122"/>
-                <a:cs typeface="Georgia" pitchFamily="34" charset="-120"/>
-              </a:rPr>
-              <a:t>Three looks, classically aligned</a:t>
-            </a:r>
-            <a:endParaRPr lang="en-US" sz="3400" dirty="0"/>
-          </a:p>
-        </p:txBody>
-      </p:sp>
-      <p:sp>
-        <p:nvSpPr>
-          <p:cNvPr id="6" name="Text 4"/>
-          <p:cNvSpPr/>
-          <p:nvPr/>
-        </p:nvSpPr>
-        <p:spPr>
-          <a:xfrm>
-            <a:off x="822960" y="2057400"/>
-            <a:ext cx="3246120" cy="640080"/>
-          </a:xfrm>
-          <a:prstGeom prst="rect">
-            <a:avLst/>
-          </a:prstGeom>
-          <a:noFill/>
-          <a:ln/>
-        </p:spPr>
-        <p:txBody>
-          <a:bodyPr wrap="square" lIns="0" tIns="0" rIns="0" bIns="0" rtlCol="0" anchor="ctr"/>
-          <a:lstStyle/>
-          <a:p>
-            <a:pPr indent="0" marL="0">
-              <a:buNone/>
-            </a:pPr>
-            <a:r>
-              <a:rPr lang="en-US" sz="3600" dirty="0">
-                <a:solidFill>
-                  <a:srgbClr val="A3C1AD"/>
-                </a:solidFill>
-                <a:latin typeface="Georgia" pitchFamily="34" charset="0"/>
-                <a:ea typeface="Georgia" pitchFamily="34" charset="-122"/>
-                <a:cs typeface="Georgia" pitchFamily="34" charset="-120"/>
-              </a:rPr>
-              <a:t>01</a:t>
-            </a:r>
-            <a:endParaRPr lang="en-US" sz="3600" dirty="0"/>
-          </a:p>
-        </p:txBody>
-      </p:sp>
-      <p:sp>
-        <p:nvSpPr>
-          <p:cNvPr id="7" name="Text 5"/>
-          <p:cNvSpPr/>
-          <p:nvPr/>
-        </p:nvSpPr>
-        <p:spPr>
-          <a:xfrm>
-            <a:off x="822960" y="2743200"/>
-            <a:ext cx="3246120" cy="502920"/>
-          </a:xfrm>
-          <a:prstGeom prst="rect">
-            <a:avLst/>
-          </a:prstGeom>
-          <a:noFill/>
-          <a:ln/>
-        </p:spPr>
-        <p:txBody>
-          <a:bodyPr wrap="square" lIns="0" tIns="0" rIns="0" bIns="0" rtlCol="0" anchor="ctr"/>
-          <a:lstStyle/>
-          <a:p>
-            <a:pPr indent="0" marL="0">
-              <a:buNone/>
-            </a:pPr>
-            <a:r>
-              <a:rPr lang="en-US" sz="2100" dirty="0">
-                <a:solidFill>
-                  <a:srgbClr val="4A6B5D"/>
-                </a:solidFill>
-                <a:latin typeface="Georgia" pitchFamily="34" charset="0"/>
-                <a:ea typeface="Georgia" pitchFamily="34" charset="-122"/>
-                <a:cs typeface="Georgia" pitchFamily="34" charset="-120"/>
-              </a:rPr>
-              <a:t>The camera's</a:t>
-            </a:r>
-            <a:endParaRPr lang="en-US" sz="2100" dirty="0"/>
-          </a:p>
-        </p:txBody>
-      </p:sp>
-      <p:sp>
-        <p:nvSpPr>
-          <p:cNvPr id="8" name="Shape 6"/>
-          <p:cNvSpPr/>
-          <p:nvPr/>
-        </p:nvSpPr>
-        <p:spPr>
-          <a:xfrm>
-            <a:off x="822960" y="3291840"/>
-            <a:ext cx="3246120" cy="0"/>
-          </a:xfrm>
-          <a:prstGeom prst="line">
-            <a:avLst/>
-          </a:prstGeom>
-          <a:noFill/>
+          <p:cNvPr id="5" name="Shape 3"/>
+          <p:cNvSpPr/>
+          <p:nvPr/>
+        </p:nvSpPr>
+        <p:spPr>
+          <a:xfrm>
+            <a:off x="822960" y="1097280"/>
+            <a:ext cx="3762756" cy="4480560"/>
+          </a:xfrm>
+          <a:prstGeom prst="rect">
+            <a:avLst/>
+          </a:prstGeom>
+          <a:solidFill>
+            <a:srgbClr val="FAF8F1"/>
+          </a:solidFill>
           <a:ln w="9525">
             <a:solidFill>
               <a:srgbClr val="D9D4C4"/>
@@ -4654,141 +4854,47 @@
           </a:ln>
         </p:spPr>
       </p:sp>
-      <p:sp>
-        <p:nvSpPr>
-          <p:cNvPr id="9" name="Text 7"/>
-          <p:cNvSpPr/>
-          <p:nvPr/>
-        </p:nvSpPr>
-        <p:spPr>
-          <a:xfrm>
-            <a:off x="822960" y="3429000"/>
-            <a:ext cx="3246120" cy="1828800"/>
-          </a:xfrm>
-          <a:prstGeom prst="rect">
-            <a:avLst/>
-          </a:prstGeom>
-          <a:noFill/>
-          <a:ln/>
-        </p:spPr>
-        <p:txBody>
-          <a:bodyPr wrap="square" lIns="0" tIns="0" rIns="0" bIns="0" rtlCol="0" anchor="t"/>
-          <a:lstStyle/>
-          <a:p>
-            <a:pPr indent="0" marL="0">
-              <a:lnSpc>
-                <a:spcPts val="2200"/>
-              </a:lnSpc>
-              <a:buNone/>
-            </a:pPr>
-            <a:r>
-              <a:rPr lang="en-US" sz="1600" dirty="0">
-                <a:solidFill>
-                  <a:srgbClr val="24313F"/>
-                </a:solidFill>
-                <a:latin typeface="Georgia" pitchFamily="34" charset="0"/>
-                <a:ea typeface="Georgia" pitchFamily="34" charset="-122"/>
-                <a:cs typeface="Georgia" pitchFamily="34" charset="-120"/>
-              </a:rPr>
-              <a:t>How the shot itself frames, lingers, and fragments the figure on screen.</a:t>
-            </a:r>
-            <a:endParaRPr lang="en-US" sz="1600" dirty="0"/>
-          </a:p>
-        </p:txBody>
-      </p:sp>
-      <p:sp>
-        <p:nvSpPr>
-          <p:cNvPr id="10" name="Text 8"/>
-          <p:cNvSpPr/>
-          <p:nvPr/>
-        </p:nvSpPr>
-        <p:spPr>
-          <a:xfrm>
-            <a:off x="4471416" y="2057400"/>
-            <a:ext cx="3246120" cy="640080"/>
-          </a:xfrm>
-          <a:prstGeom prst="rect">
-            <a:avLst/>
-          </a:prstGeom>
-          <a:noFill/>
-          <a:ln/>
-        </p:spPr>
-        <p:txBody>
-          <a:bodyPr wrap="square" lIns="0" tIns="0" rIns="0" bIns="0" rtlCol="0" anchor="ctr"/>
-          <a:lstStyle/>
-          <a:p>
-            <a:pPr indent="0" marL="0">
-              <a:buNone/>
-            </a:pPr>
-            <a:r>
-              <a:rPr lang="en-US" sz="3600" dirty="0">
-                <a:solidFill>
-                  <a:srgbClr val="A3C1AD"/>
-                </a:solidFill>
-                <a:latin typeface="Georgia" pitchFamily="34" charset="0"/>
-                <a:ea typeface="Georgia" pitchFamily="34" charset="-122"/>
-                <a:cs typeface="Georgia" pitchFamily="34" charset="-120"/>
-              </a:rPr>
-              <a:t>02</a:t>
-            </a:r>
-            <a:endParaRPr lang="en-US" sz="3600" dirty="0"/>
-          </a:p>
-        </p:txBody>
-      </p:sp>
-      <p:sp>
-        <p:nvSpPr>
-          <p:cNvPr id="11" name="Text 9"/>
-          <p:cNvSpPr/>
-          <p:nvPr/>
-        </p:nvSpPr>
-        <p:spPr>
-          <a:xfrm>
-            <a:off x="4471416" y="2743200"/>
-            <a:ext cx="3246120" cy="502920"/>
-          </a:xfrm>
-          <a:prstGeom prst="rect">
-            <a:avLst/>
-          </a:prstGeom>
-          <a:noFill/>
-          <a:ln/>
-        </p:spPr>
-        <p:txBody>
-          <a:bodyPr wrap="square" lIns="0" tIns="0" rIns="0" bIns="0" rtlCol="0" anchor="ctr"/>
-          <a:lstStyle/>
-          <a:p>
-            <a:pPr indent="0" marL="0">
-              <a:buNone/>
-            </a:pPr>
-            <a:r>
-              <a:rPr lang="en-US" sz="2100" dirty="0">
-                <a:solidFill>
-                  <a:srgbClr val="4A6B5D"/>
-                </a:solidFill>
-                <a:latin typeface="Georgia" pitchFamily="34" charset="0"/>
-                <a:ea typeface="Georgia" pitchFamily="34" charset="-122"/>
-                <a:cs typeface="Georgia" pitchFamily="34" charset="-120"/>
-              </a:rPr>
-              <a:t>The characters'</a:t>
-            </a:r>
-            <a:endParaRPr lang="en-US" sz="2100" dirty="0"/>
-          </a:p>
-        </p:txBody>
-      </p:sp>
-      <p:sp>
-        <p:nvSpPr>
-          <p:cNvPr id="12" name="Shape 10"/>
-          <p:cNvSpPr/>
-          <p:nvPr/>
-        </p:nvSpPr>
-        <p:spPr>
-          <a:xfrm>
-            <a:off x="4471416" y="3291840"/>
-            <a:ext cx="3246120" cy="0"/>
-          </a:xfrm>
-          <a:prstGeom prst="line">
-            <a:avLst/>
-          </a:prstGeom>
-          <a:noFill/>
+      <p:pic>
+        <p:nvPicPr>
+          <p:cNvPr id="6" name="Image 0" descr="/Users/dogan/Documents/Vaults/Courses/wiki/classes/media-studies/decks/_build/img/dior-jadore.jpg">    </p:cNvPr>
+          <p:cNvPicPr>
+            <a:picLocks noChangeAspect="1"/>
+          </p:cNvPicPr>
+          <p:nvPr/>
+        </p:nvPicPr>
+        <p:blipFill>
+          <a:blip r:embed="rId1"/>
+          <a:stretch>
+            <a:fillRect/>
+          </a:stretch>
+        </p:blipFill>
+        <p:spPr>
+          <a:xfrm>
+            <a:off x="1188703" y="1170432"/>
+            <a:ext cx="3031270" cy="4334256"/>
+          </a:xfrm>
+          <a:prstGeom prst="rect">
+            <a:avLst/>
+          </a:prstGeom>
+        </p:spPr>
+      </p:pic>
+      <p:sp>
+        <p:nvSpPr>
+          <p:cNvPr id="7" name="Shape 4"/>
+          <p:cNvSpPr/>
+          <p:nvPr/>
+        </p:nvSpPr>
+        <p:spPr>
+          <a:xfrm>
+            <a:off x="4951476" y="1097280"/>
+            <a:ext cx="3762756" cy="4480560"/>
+          </a:xfrm>
+          <a:prstGeom prst="rect">
+            <a:avLst/>
+          </a:prstGeom>
+          <a:solidFill>
+            <a:srgbClr val="FAF8F1"/>
+          </a:solidFill>
           <a:ln w="9525">
             <a:solidFill>
               <a:srgbClr val="D9D4C4"/>
@@ -4797,16 +4903,157 @@
           </a:ln>
         </p:spPr>
       </p:sp>
-      <p:sp>
-        <p:nvSpPr>
-          <p:cNvPr id="13" name="Text 11"/>
-          <p:cNvSpPr/>
-          <p:nvPr/>
-        </p:nvSpPr>
-        <p:spPr>
-          <a:xfrm>
-            <a:off x="4471416" y="3429000"/>
-            <a:ext cx="3246120" cy="1828800"/>
+      <p:pic>
+        <p:nvPicPr>
+          <p:cNvPr id="8" name="Image 1" descr="/Users/dogan/Documents/Vaults/Courses/wiki/classes/media-studies/decks/_build/img/dior-sauvage.jpg">    </p:cNvPr>
+          <p:cNvPicPr>
+            <a:picLocks noChangeAspect="1"/>
+          </p:cNvPicPr>
+          <p:nvPr/>
+        </p:nvPicPr>
+        <p:blipFill>
+          <a:blip r:embed="rId2"/>
+          <a:stretch>
+            <a:fillRect/>
+          </a:stretch>
+        </p:blipFill>
+        <p:spPr>
+          <a:xfrm>
+            <a:off x="5264252" y="1170432"/>
+            <a:ext cx="3137203" cy="4334256"/>
+          </a:xfrm>
+          <a:prstGeom prst="rect">
+            <a:avLst/>
+          </a:prstGeom>
+        </p:spPr>
+      </p:pic>
+      <p:sp>
+        <p:nvSpPr>
+          <p:cNvPr id="9" name="Text 5"/>
+          <p:cNvSpPr/>
+          <p:nvPr/>
+        </p:nvSpPr>
+        <p:spPr>
+          <a:xfrm>
+            <a:off x="822960" y="5596128"/>
+            <a:ext cx="3762756" cy="274320"/>
+          </a:xfrm>
+          <a:prstGeom prst="rect">
+            <a:avLst/>
+          </a:prstGeom>
+          <a:noFill/>
+          <a:ln/>
+        </p:spPr>
+        <p:txBody>
+          <a:bodyPr wrap="square" lIns="0" tIns="0" rIns="0" bIns="0" rtlCol="0" anchor="ctr"/>
+          <a:lstStyle/>
+          <a:p>
+            <a:pPr algn="ctr" indent="0" marL="0">
+              <a:buNone/>
+            </a:pPr>
+            <a:r>
+              <a:rPr lang="en-US" sz="1000" dirty="0">
+                <a:solidFill>
+                  <a:srgbClr val="7A7F72"/>
+                </a:solidFill>
+                <a:latin typeface="Arial" pitchFamily="34" charset="0"/>
+                <a:ea typeface="Arial" pitchFamily="34" charset="-122"/>
+                <a:cs typeface="Arial" pitchFamily="34" charset="-120"/>
+              </a:rPr>
+              <a:t>Dior, J'adore</a:t>
+            </a:r>
+            <a:endParaRPr lang="en-US" sz="1000" dirty="0"/>
+          </a:p>
+        </p:txBody>
+      </p:sp>
+      <p:sp>
+        <p:nvSpPr>
+          <p:cNvPr id="10" name="Text 6"/>
+          <p:cNvSpPr/>
+          <p:nvPr/>
+        </p:nvSpPr>
+        <p:spPr>
+          <a:xfrm>
+            <a:off x="4951476" y="5596128"/>
+            <a:ext cx="3762756" cy="274320"/>
+          </a:xfrm>
+          <a:prstGeom prst="rect">
+            <a:avLst/>
+          </a:prstGeom>
+          <a:noFill/>
+          <a:ln/>
+        </p:spPr>
+        <p:txBody>
+          <a:bodyPr wrap="square" lIns="0" tIns="0" rIns="0" bIns="0" rtlCol="0" anchor="ctr"/>
+          <a:lstStyle/>
+          <a:p>
+            <a:pPr algn="ctr" indent="0" marL="0">
+              <a:buNone/>
+            </a:pPr>
+            <a:r>
+              <a:rPr lang="en-US" sz="1000" dirty="0">
+                <a:solidFill>
+                  <a:srgbClr val="7A7F72"/>
+                </a:solidFill>
+                <a:latin typeface="Arial" pitchFamily="34" charset="0"/>
+                <a:ea typeface="Arial" pitchFamily="34" charset="-122"/>
+                <a:cs typeface="Arial" pitchFamily="34" charset="-120"/>
+              </a:rPr>
+              <a:t>Dior, Sauvage</a:t>
+            </a:r>
+            <a:endParaRPr lang="en-US" sz="1000" dirty="0"/>
+          </a:p>
+        </p:txBody>
+      </p:sp>
+      <p:sp>
+        <p:nvSpPr>
+          <p:cNvPr id="11" name="Text 7"/>
+          <p:cNvSpPr/>
+          <p:nvPr/>
+        </p:nvSpPr>
+        <p:spPr>
+          <a:xfrm>
+            <a:off x="9125712" y="1325880"/>
+            <a:ext cx="2377440" cy="365760"/>
+          </a:xfrm>
+          <a:prstGeom prst="rect">
+            <a:avLst/>
+          </a:prstGeom>
+          <a:noFill/>
+          <a:ln/>
+        </p:spPr>
+        <p:txBody>
+          <a:bodyPr wrap="square" lIns="0" tIns="0" rIns="0" bIns="0" rtlCol="0" anchor="ctr"/>
+          <a:lstStyle/>
+          <a:p>
+            <a:pPr indent="0" marL="0">
+              <a:buNone/>
+            </a:pPr>
+            <a:r>
+              <a:rPr lang="en-US" sz="1200" b="1" spc="100" kern="0" dirty="0">
+                <a:solidFill>
+                  <a:srgbClr val="4A6B5D"/>
+                </a:solidFill>
+                <a:latin typeface="Arial" pitchFamily="34" charset="0"/>
+                <a:ea typeface="Arial" pitchFamily="34" charset="-122"/>
+                <a:cs typeface="Arial" pitchFamily="34" charset="-120"/>
+              </a:rPr>
+              <a:t>Pose</a:t>
+            </a:r>
+            <a:endParaRPr lang="en-US" sz="1200" dirty="0"/>
+          </a:p>
+        </p:txBody>
+      </p:sp>
+      <p:sp>
+        <p:nvSpPr>
+          <p:cNvPr id="12" name="Text 8"/>
+          <p:cNvSpPr/>
+          <p:nvPr/>
+        </p:nvSpPr>
+        <p:spPr>
+          <a:xfrm>
+            <a:off x="9125712" y="1691640"/>
+            <a:ext cx="2423160" cy="685800"/>
           </a:xfrm>
           <a:prstGeom prst="rect">
             <a:avLst/>
@@ -4820,12 +5067,12 @@
           <a:p>
             <a:pPr indent="0" marL="0">
               <a:lnSpc>
-                <a:spcPts val="2200"/>
+                <a:spcPts val="1700"/>
               </a:lnSpc>
               <a:buNone/>
             </a:pPr>
             <a:r>
-              <a:rPr lang="en-US" sz="1600" dirty="0">
+              <a:rPr lang="en-US" sz="1300" dirty="0">
                 <a:solidFill>
                   <a:srgbClr val="24313F"/>
                 </a:solidFill>
@@ -4833,22 +5080,22 @@
                 <a:ea typeface="Georgia" pitchFamily="34" charset="-122"/>
                 <a:cs typeface="Georgia" pitchFamily="34" charset="-120"/>
               </a:rPr>
-              <a:t>How people within the story look at one another inside the narrative.</a:t>
-            </a:r>
-            <a:endParaRPr lang="en-US" sz="1600" dirty="0"/>
-          </a:p>
-        </p:txBody>
-      </p:sp>
-      <p:sp>
-        <p:nvSpPr>
-          <p:cNvPr id="14" name="Text 12"/>
-          <p:cNvSpPr/>
-          <p:nvPr/>
-        </p:nvSpPr>
-        <p:spPr>
-          <a:xfrm>
-            <a:off x="8119872" y="2057400"/>
-            <a:ext cx="3246120" cy="640080"/>
+              <a:t>offered stillness against restless motion</a:t>
+            </a:r>
+            <a:endParaRPr lang="en-US" sz="1300" dirty="0"/>
+          </a:p>
+        </p:txBody>
+      </p:sp>
+      <p:sp>
+        <p:nvSpPr>
+          <p:cNvPr id="13" name="Text 9"/>
+          <p:cNvSpPr/>
+          <p:nvPr/>
+        </p:nvSpPr>
+        <p:spPr>
+          <a:xfrm>
+            <a:off x="9125712" y="2468880"/>
+            <a:ext cx="2377440" cy="365760"/>
           </a:xfrm>
           <a:prstGeom prst="rect">
             <a:avLst/>
@@ -4864,30 +5111,72 @@
               <a:buNone/>
             </a:pPr>
             <a:r>
-              <a:rPr lang="en-US" sz="3600" dirty="0">
-                <a:solidFill>
-                  <a:srgbClr val="A3C1AD"/>
+              <a:rPr lang="en-US" sz="1200" b="1" spc="100" kern="0" dirty="0">
+                <a:solidFill>
+                  <a:srgbClr val="4A6B5D"/>
+                </a:solidFill>
+                <a:latin typeface="Arial" pitchFamily="34" charset="0"/>
+                <a:ea typeface="Arial" pitchFamily="34" charset="-122"/>
+                <a:cs typeface="Arial" pitchFamily="34" charset="-120"/>
+              </a:rPr>
+              <a:t>Gaze</a:t>
+            </a:r>
+            <a:endParaRPr lang="en-US" sz="1200" dirty="0"/>
+          </a:p>
+        </p:txBody>
+      </p:sp>
+      <p:sp>
+        <p:nvSpPr>
+          <p:cNvPr id="14" name="Text 10"/>
+          <p:cNvSpPr/>
+          <p:nvPr/>
+        </p:nvSpPr>
+        <p:spPr>
+          <a:xfrm>
+            <a:off x="9125712" y="2834640"/>
+            <a:ext cx="2423160" cy="685800"/>
+          </a:xfrm>
+          <a:prstGeom prst="rect">
+            <a:avLst/>
+          </a:prstGeom>
+          <a:noFill/>
+          <a:ln/>
+        </p:spPr>
+        <p:txBody>
+          <a:bodyPr wrap="square" lIns="0" tIns="0" rIns="0" bIns="0" rtlCol="0" anchor="t"/>
+          <a:lstStyle/>
+          <a:p>
+            <a:pPr indent="0" marL="0">
+              <a:lnSpc>
+                <a:spcPts val="1700"/>
+              </a:lnSpc>
+              <a:buNone/>
+            </a:pPr>
+            <a:r>
+              <a:rPr lang="en-US" sz="1300" dirty="0">
+                <a:solidFill>
+                  <a:srgbClr val="24313F"/>
                 </a:solidFill>
                 <a:latin typeface="Georgia" pitchFamily="34" charset="0"/>
                 <a:ea typeface="Georgia" pitchFamily="34" charset="-122"/>
                 <a:cs typeface="Georgia" pitchFamily="34" charset="-120"/>
               </a:rPr>
-              <a:t>03</a:t>
-            </a:r>
-            <a:endParaRPr lang="en-US" sz="3600" dirty="0"/>
-          </a:p>
-        </p:txBody>
-      </p:sp>
-      <p:sp>
-        <p:nvSpPr>
-          <p:cNvPr id="15" name="Text 13"/>
-          <p:cNvSpPr/>
-          <p:nvPr/>
-        </p:nvSpPr>
-        <p:spPr>
-          <a:xfrm>
-            <a:off x="8119872" y="2743200"/>
-            <a:ext cx="3246120" cy="502920"/>
+              <a:t>sent past us; sent straight at us</a:t>
+            </a:r>
+            <a:endParaRPr lang="en-US" sz="1300" dirty="0"/>
+          </a:p>
+        </p:txBody>
+      </p:sp>
+      <p:sp>
+        <p:nvSpPr>
+          <p:cNvPr id="15" name="Text 11"/>
+          <p:cNvSpPr/>
+          <p:nvPr/>
+        </p:nvSpPr>
+        <p:spPr>
+          <a:xfrm>
+            <a:off x="9125712" y="3611880"/>
+            <a:ext cx="2377440" cy="365760"/>
           </a:xfrm>
           <a:prstGeom prst="rect">
             <a:avLst/>
@@ -4903,30 +5192,153 @@
               <a:buNone/>
             </a:pPr>
             <a:r>
-              <a:rPr lang="en-US" sz="2100" dirty="0">
+              <a:rPr lang="en-US" sz="1200" b="1" spc="100" kern="0" dirty="0">
                 <a:solidFill>
                   <a:srgbClr val="4A6B5D"/>
+                </a:solidFill>
+                <a:latin typeface="Arial" pitchFamily="34" charset="0"/>
+                <a:ea typeface="Arial" pitchFamily="34" charset="-122"/>
+                <a:cs typeface="Arial" pitchFamily="34" charset="-120"/>
+              </a:rPr>
+              <a:t>Fragment</a:t>
+            </a:r>
+            <a:endParaRPr lang="en-US" sz="1200" dirty="0"/>
+          </a:p>
+        </p:txBody>
+      </p:sp>
+      <p:sp>
+        <p:nvSpPr>
+          <p:cNvPr id="16" name="Text 12"/>
+          <p:cNvSpPr/>
+          <p:nvPr/>
+        </p:nvSpPr>
+        <p:spPr>
+          <a:xfrm>
+            <a:off x="9125712" y="3977640"/>
+            <a:ext cx="2423160" cy="685800"/>
+          </a:xfrm>
+          <a:prstGeom prst="rect">
+            <a:avLst/>
+          </a:prstGeom>
+          <a:noFill/>
+          <a:ln/>
+        </p:spPr>
+        <p:txBody>
+          <a:bodyPr wrap="square" lIns="0" tIns="0" rIns="0" bIns="0" rtlCol="0" anchor="t"/>
+          <a:lstStyle/>
+          <a:p>
+            <a:pPr indent="0" marL="0">
+              <a:lnSpc>
+                <a:spcPts val="1700"/>
+              </a:lnSpc>
+              <a:buNone/>
+            </a:pPr>
+            <a:r>
+              <a:rPr lang="en-US" sz="1300" dirty="0">
+                <a:solidFill>
+                  <a:srgbClr val="24313F"/>
                 </a:solidFill>
                 <a:latin typeface="Georgia" pitchFamily="34" charset="0"/>
                 <a:ea typeface="Georgia" pitchFamily="34" charset="-122"/>
                 <a:cs typeface="Georgia" pitchFamily="34" charset="-120"/>
               </a:rPr>
-              <a:t>The audience's</a:t>
-            </a:r>
-            <a:endParaRPr lang="en-US" sz="2100" dirty="0"/>
-          </a:p>
-        </p:txBody>
-      </p:sp>
-      <p:sp>
-        <p:nvSpPr>
-          <p:cNvPr id="16" name="Shape 14"/>
-          <p:cNvSpPr/>
-          <p:nvPr/>
-        </p:nvSpPr>
-        <p:spPr>
-          <a:xfrm>
-            <a:off x="8119872" y="3291840"/>
-            <a:ext cx="3246120" cy="0"/>
+              <a:t>the dress is the body; the face is the man</a:t>
+            </a:r>
+            <a:endParaRPr lang="en-US" sz="1300" dirty="0"/>
+          </a:p>
+        </p:txBody>
+      </p:sp>
+      <p:sp>
+        <p:nvSpPr>
+          <p:cNvPr id="17" name="Text 13"/>
+          <p:cNvSpPr/>
+          <p:nvPr/>
+        </p:nvSpPr>
+        <p:spPr>
+          <a:xfrm>
+            <a:off x="9125712" y="4754880"/>
+            <a:ext cx="2377440" cy="365760"/>
+          </a:xfrm>
+          <a:prstGeom prst="rect">
+            <a:avLst/>
+          </a:prstGeom>
+          <a:noFill/>
+          <a:ln/>
+        </p:spPr>
+        <p:txBody>
+          <a:bodyPr wrap="square" lIns="0" tIns="0" rIns="0" bIns="0" rtlCol="0" anchor="ctr"/>
+          <a:lstStyle/>
+          <a:p>
+            <a:pPr indent="0" marL="0">
+              <a:buNone/>
+            </a:pPr>
+            <a:r>
+              <a:rPr lang="en-US" sz="1200" b="1" spc="100" kern="0" dirty="0">
+                <a:solidFill>
+                  <a:srgbClr val="4A6B5D"/>
+                </a:solidFill>
+                <a:latin typeface="Arial" pitchFamily="34" charset="0"/>
+                <a:ea typeface="Arial" pitchFamily="34" charset="-122"/>
+                <a:cs typeface="Arial" pitchFamily="34" charset="-120"/>
+              </a:rPr>
+              <a:t>Setting</a:t>
+            </a:r>
+            <a:endParaRPr lang="en-US" sz="1200" dirty="0"/>
+          </a:p>
+        </p:txBody>
+      </p:sp>
+      <p:sp>
+        <p:nvSpPr>
+          <p:cNvPr id="18" name="Text 14"/>
+          <p:cNvSpPr/>
+          <p:nvPr/>
+        </p:nvSpPr>
+        <p:spPr>
+          <a:xfrm>
+            <a:off x="9125712" y="5120640"/>
+            <a:ext cx="2423160" cy="685800"/>
+          </a:xfrm>
+          <a:prstGeom prst="rect">
+            <a:avLst/>
+          </a:prstGeom>
+          <a:noFill/>
+          <a:ln/>
+        </p:spPr>
+        <p:txBody>
+          <a:bodyPr wrap="square" lIns="0" tIns="0" rIns="0" bIns="0" rtlCol="0" anchor="t"/>
+          <a:lstStyle/>
+          <a:p>
+            <a:pPr indent="0" marL="0">
+              <a:lnSpc>
+                <a:spcPts val="1700"/>
+              </a:lnSpc>
+              <a:buNone/>
+            </a:pPr>
+            <a:r>
+              <a:rPr lang="en-US" sz="1300" dirty="0">
+                <a:solidFill>
+                  <a:srgbClr val="24313F"/>
+                </a:solidFill>
+                <a:latin typeface="Georgia" pitchFamily="34" charset="0"/>
+                <a:ea typeface="Georgia" pitchFamily="34" charset="-122"/>
+                <a:cs typeface="Georgia" pitchFamily="34" charset="-120"/>
+              </a:rPr>
+              <a:t>golden sea against burnt desert</a:t>
+            </a:r>
+            <a:endParaRPr lang="en-US" sz="1300" dirty="0"/>
+          </a:p>
+        </p:txBody>
+      </p:sp>
+      <p:sp>
+        <p:nvSpPr>
+          <p:cNvPr id="19" name="Shape 15"/>
+          <p:cNvSpPr/>
+          <p:nvPr/>
+        </p:nvSpPr>
+        <p:spPr>
+          <a:xfrm>
+            <a:off x="822960" y="6382512"/>
+            <a:ext cx="10543032" cy="0"/>
           </a:xfrm>
           <a:prstGeom prst="line">
             <a:avLst/>
@@ -4942,14 +5354,243 @@
       </p:sp>
       <p:sp>
         <p:nvSpPr>
-          <p:cNvPr id="17" name="Text 15"/>
-          <p:cNvSpPr/>
-          <p:nvPr/>
-        </p:nvSpPr>
-        <p:spPr>
-          <a:xfrm>
-            <a:off x="8119872" y="3429000"/>
-            <a:ext cx="3246120" cy="1828800"/>
+          <p:cNvPr id="20" name="Text 16"/>
+          <p:cNvSpPr/>
+          <p:nvPr/>
+        </p:nvSpPr>
+        <p:spPr>
+          <a:xfrm>
+            <a:off x="822960" y="6419088"/>
+            <a:ext cx="7315200" cy="274320"/>
+          </a:xfrm>
+          <a:prstGeom prst="rect">
+            <a:avLst/>
+          </a:prstGeom>
+          <a:noFill/>
+          <a:ln/>
+        </p:spPr>
+        <p:txBody>
+          <a:bodyPr wrap="square" lIns="0" tIns="0" rIns="0" bIns="0" rtlCol="0" anchor="ctr"/>
+          <a:lstStyle/>
+          <a:p>
+            <a:pPr indent="0" marL="0">
+              <a:buNone/>
+            </a:pPr>
+            <a:r>
+              <a:rPr lang="en-US" sz="900" spc="150" kern="0" dirty="0">
+                <a:solidFill>
+                  <a:srgbClr val="7A7F72"/>
+                </a:solidFill>
+                <a:latin typeface="Arial" pitchFamily="34" charset="0"/>
+                <a:ea typeface="Arial" pitchFamily="34" charset="-122"/>
+                <a:cs typeface="Arial" pitchFamily="34" charset="-120"/>
+              </a:rPr>
+              <a:t>MEDIA STUDIES 9607 · SEMESTER I</a:t>
+            </a:r>
+            <a:endParaRPr lang="en-US" sz="900" dirty="0"/>
+          </a:p>
+        </p:txBody>
+      </p:sp>
+      <p:sp>
+        <p:nvSpPr>
+          <p:cNvPr id="21" name="Text 17"/>
+          <p:cNvSpPr/>
+          <p:nvPr/>
+        </p:nvSpPr>
+        <p:spPr>
+          <a:xfrm>
+            <a:off x="10268712" y="6355080"/>
+            <a:ext cx="1097280" cy="365760"/>
+          </a:xfrm>
+          <a:prstGeom prst="rect">
+            <a:avLst/>
+          </a:prstGeom>
+          <a:noFill/>
+          <a:ln/>
+        </p:spPr>
+        <p:txBody>
+          <a:bodyPr wrap="square" lIns="0" tIns="0" rIns="0" bIns="0" rtlCol="0" anchor="ctr"/>
+          <a:lstStyle/>
+          <a:p>
+            <a:pPr algn="r" indent="0" marL="0">
+              <a:buNone/>
+            </a:pPr>
+            <a:r>
+              <a:rPr lang="en-US" sz="1600" dirty="0">
+                <a:solidFill>
+                  <a:srgbClr val="A3C1AD"/>
+                </a:solidFill>
+                <a:latin typeface="Georgia" pitchFamily="34" charset="0"/>
+                <a:ea typeface="Georgia" pitchFamily="34" charset="-122"/>
+                <a:cs typeface="Georgia" pitchFamily="34" charset="-120"/>
+              </a:rPr>
+              <a:t>02</a:t>
+            </a:r>
+            <a:endParaRPr lang="en-US" sz="1600" dirty="0"/>
+          </a:p>
+        </p:txBody>
+      </p:sp>
+    </p:spTree>
+  </p:cSld>
+  <p:clrMapOvr>
+    <a:masterClrMapping/>
+  </p:clrMapOvr>
+</p:sld>
+</file>
+
+<file path=ppt/slides/slide5.xml><?xml version="1.0" encoding="utf-8"?>
+<p:sld xmlns:a="http://schemas.openxmlformats.org/drawingml/2006/main" xmlns:r="http://schemas.openxmlformats.org/officeDocument/2006/relationships" xmlns:p="http://schemas.openxmlformats.org/presentationml/2006/main">
+  <p:cSld name="Slide 5">
+    <p:spTree>
+      <p:nvGrpSpPr>
+        <p:cNvPr id="1" name=""/>
+        <p:cNvGrpSpPr/>
+        <p:nvPr/>
+      </p:nvGrpSpPr>
+      <p:grpSpPr>
+        <a:xfrm>
+          <a:off x="0" y="0"/>
+          <a:ext cx="0" cy="0"/>
+          <a:chOff x="0" y="0"/>
+          <a:chExt cx="0" cy="0"/>
+        </a:xfrm>
+      </p:grpSpPr>
+      <p:pic>
+        <p:nvPicPr>
+          <p:cNvPr id="2" name="Image 0" descr="/Users/dogan/Documents/Vaults/Courses/wiki/classes/media-studies/decks/_build/img/crops/manet-folies_a1777.jpg">    </p:cNvPr>
+          <p:cNvPicPr>
+            <a:picLocks noChangeAspect="1"/>
+          </p:cNvPicPr>
+          <p:nvPr/>
+        </p:nvPicPr>
+        <p:blipFill>
+          <a:blip r:embed="rId1"/>
+          <a:stretch>
+            <a:fillRect/>
+          </a:stretch>
+        </p:blipFill>
+        <p:spPr>
+          <a:xfrm>
+            <a:off x="0" y="0"/>
+            <a:ext cx="12188952" cy="6858000"/>
+          </a:xfrm>
+          <a:prstGeom prst="rect">
+            <a:avLst/>
+          </a:prstGeom>
+        </p:spPr>
+      </p:pic>
+      <p:sp>
+        <p:nvSpPr>
+          <p:cNvPr id="3" name="Shape 0"/>
+          <p:cNvSpPr/>
+          <p:nvPr/>
+        </p:nvSpPr>
+        <p:spPr>
+          <a:xfrm>
+            <a:off x="502920" y="502920"/>
+            <a:ext cx="5120640" cy="502920"/>
+          </a:xfrm>
+          <a:prstGeom prst="rect">
+            <a:avLst/>
+          </a:prstGeom>
+          <a:solidFill>
+            <a:srgbClr val="FAF8F1"/>
+          </a:solidFill>
+          <a:ln/>
+        </p:spPr>
+      </p:sp>
+      <p:sp>
+        <p:nvSpPr>
+          <p:cNvPr id="4" name="Text 1"/>
+          <p:cNvSpPr/>
+          <p:nvPr/>
+        </p:nvSpPr>
+        <p:spPr>
+          <a:xfrm>
+            <a:off x="704088" y="521208"/>
+            <a:ext cx="4846320" cy="274320"/>
+          </a:xfrm>
+          <a:prstGeom prst="rect">
+            <a:avLst/>
+          </a:prstGeom>
+          <a:noFill/>
+          <a:ln/>
+        </p:spPr>
+        <p:txBody>
+          <a:bodyPr wrap="square" lIns="0" tIns="0" rIns="0" bIns="0" rtlCol="0" anchor="ctr"/>
+          <a:lstStyle/>
+          <a:p>
+            <a:pPr algn="l" indent="0" marL="0">
+              <a:buNone/>
+            </a:pPr>
+            <a:r>
+              <a:rPr lang="en-US" sz="1100" b="1" spc="250" kern="0" dirty="0">
+                <a:solidFill>
+                  <a:srgbClr val="4A6B5D"/>
+                </a:solidFill>
+                <a:latin typeface="Arial" pitchFamily="34" charset="0"/>
+                <a:ea typeface="Arial" pitchFamily="34" charset="-122"/>
+                <a:cs typeface="Arial" pitchFamily="34" charset="-120"/>
+              </a:rPr>
+              <a:t>THE LOOKING THAT WILL NOT RESOLVE</a:t>
+            </a:r>
+            <a:endParaRPr lang="en-US" sz="1100" dirty="0"/>
+          </a:p>
+        </p:txBody>
+      </p:sp>
+      <p:sp>
+        <p:nvSpPr>
+          <p:cNvPr id="5" name="Shape 2"/>
+          <p:cNvSpPr/>
+          <p:nvPr/>
+        </p:nvSpPr>
+        <p:spPr>
+          <a:xfrm>
+            <a:off x="457200" y="5230368"/>
+            <a:ext cx="8778240" cy="1243584"/>
+          </a:xfrm>
+          <a:prstGeom prst="rect">
+            <a:avLst/>
+          </a:prstGeom>
+          <a:solidFill>
+            <a:srgbClr val="FAF8F1"/>
+          </a:solidFill>
+          <a:ln/>
+        </p:spPr>
+      </p:sp>
+      <p:sp>
+        <p:nvSpPr>
+          <p:cNvPr id="6" name="Shape 3"/>
+          <p:cNvSpPr/>
+          <p:nvPr/>
+        </p:nvSpPr>
+        <p:spPr>
+          <a:xfrm>
+            <a:off x="676656" y="5468112"/>
+            <a:ext cx="731520" cy="0"/>
+          </a:xfrm>
+          <a:prstGeom prst="line">
+            <a:avLst/>
+          </a:prstGeom>
+          <a:noFill/>
+          <a:ln w="28575">
+            <a:solidFill>
+              <a:srgbClr val="8C3A38"/>
+            </a:solidFill>
+            <a:prstDash val="solid"/>
+          </a:ln>
+        </p:spPr>
+      </p:sp>
+      <p:sp>
+        <p:nvSpPr>
+          <p:cNvPr id="7" name="Text 4"/>
+          <p:cNvSpPr/>
+          <p:nvPr/>
+        </p:nvSpPr>
+        <p:spPr>
+          <a:xfrm>
+            <a:off x="676656" y="5541264"/>
+            <a:ext cx="8339328" cy="585216"/>
           </a:xfrm>
           <a:prstGeom prst="rect">
             <a:avLst/>
@@ -4968,7 +5609,7 @@
               <a:buNone/>
             </a:pPr>
             <a:r>
-              <a:rPr lang="en-US" sz="1600" dirty="0">
+              <a:rPr lang="en-US" sz="1800" dirty="0">
                 <a:solidFill>
                   <a:srgbClr val="24313F"/>
                 </a:solidFill>
@@ -4976,22 +5617,22 @@
                 <a:ea typeface="Georgia" pitchFamily="34" charset="-122"/>
                 <a:cs typeface="Georgia" pitchFamily="34" charset="-120"/>
               </a:rPr>
-              <a:t>How we are positioned to look, and whose looking we are lent.</a:t>
-            </a:r>
-            <a:endParaRPr lang="en-US" sz="1600" dirty="0"/>
-          </a:p>
-        </p:txBody>
-      </p:sp>
-      <p:sp>
-        <p:nvSpPr>
-          <p:cNvPr id="18" name="Text 16"/>
-          <p:cNvSpPr/>
-          <p:nvPr/>
-        </p:nvSpPr>
-        <p:spPr>
-          <a:xfrm>
-            <a:off x="822960" y="5486400"/>
-            <a:ext cx="10543032" cy="457200"/>
+              <a:t>The mirror behind her does not add up. Who is she looking at, and who is looking at her?</a:t>
+            </a:r>
+            <a:endParaRPr lang="en-US" sz="1800" dirty="0"/>
+          </a:p>
+        </p:txBody>
+      </p:sp>
+      <p:sp>
+        <p:nvSpPr>
+          <p:cNvPr id="8" name="Text 5"/>
+          <p:cNvSpPr/>
+          <p:nvPr/>
+        </p:nvSpPr>
+        <p:spPr>
+          <a:xfrm>
+            <a:off x="676656" y="6181344"/>
+            <a:ext cx="8339328" cy="256032"/>
           </a:xfrm>
           <a:prstGeom prst="rect">
             <a:avLst/>
@@ -5007,7 +5648,7 @@
               <a:buNone/>
             </a:pPr>
             <a:r>
-              <a:rPr lang="en-US" sz="1250" i="1" dirty="0">
+              <a:rPr lang="en-US" sz="950" spc="50" kern="0" dirty="0">
                 <a:solidFill>
                   <a:srgbClr val="7A7F72"/>
                 </a:solidFill>
@@ -5015,110 +5656,9 @@
                 <a:ea typeface="Arial" pitchFamily="34" charset="-122"/>
                 <a:cs typeface="Arial" pitchFamily="34" charset="-120"/>
               </a:rPr>
-              <a:t>Classically, all three align on woman as spectacle. This is a claim from 1975 about a system, made to be tested, not recited.</a:t>
-            </a:r>
-            <a:endParaRPr lang="en-US" sz="1250" dirty="0"/>
-          </a:p>
-        </p:txBody>
-      </p:sp>
-      <p:sp>
-        <p:nvSpPr>
-          <p:cNvPr id="19" name="Shape 17"/>
-          <p:cNvSpPr/>
-          <p:nvPr/>
-        </p:nvSpPr>
-        <p:spPr>
-          <a:xfrm>
-            <a:off x="822960" y="6382512"/>
-            <a:ext cx="10543032" cy="0"/>
-          </a:xfrm>
-          <a:prstGeom prst="line">
-            <a:avLst/>
-          </a:prstGeom>
-          <a:noFill/>
-          <a:ln w="9525">
-            <a:solidFill>
-              <a:srgbClr val="D9D4C4"/>
-            </a:solidFill>
-            <a:prstDash val="solid"/>
-          </a:ln>
-        </p:spPr>
-      </p:sp>
-      <p:sp>
-        <p:nvSpPr>
-          <p:cNvPr id="20" name="Text 18"/>
-          <p:cNvSpPr/>
-          <p:nvPr/>
-        </p:nvSpPr>
-        <p:spPr>
-          <a:xfrm>
-            <a:off x="822960" y="6419088"/>
-            <a:ext cx="7315200" cy="274320"/>
-          </a:xfrm>
-          <a:prstGeom prst="rect">
-            <a:avLst/>
-          </a:prstGeom>
-          <a:noFill/>
-          <a:ln/>
-        </p:spPr>
-        <p:txBody>
-          <a:bodyPr wrap="square" lIns="0" tIns="0" rIns="0" bIns="0" rtlCol="0" anchor="ctr"/>
-          <a:lstStyle/>
-          <a:p>
-            <a:pPr indent="0" marL="0">
-              <a:buNone/>
-            </a:pPr>
-            <a:r>
-              <a:rPr lang="en-US" sz="900" spc="150" kern="0" dirty="0">
-                <a:solidFill>
-                  <a:srgbClr val="7A7F72"/>
-                </a:solidFill>
-                <a:latin typeface="Arial" pitchFamily="34" charset="0"/>
-                <a:ea typeface="Arial" pitchFamily="34" charset="-122"/>
-                <a:cs typeface="Arial" pitchFamily="34" charset="-120"/>
-              </a:rPr>
-              <a:t>MEDIA STUDIES 9607 · SEMESTER I</a:t>
-            </a:r>
-            <a:endParaRPr lang="en-US" sz="900" dirty="0"/>
-          </a:p>
-        </p:txBody>
-      </p:sp>
-      <p:sp>
-        <p:nvSpPr>
-          <p:cNvPr id="21" name="Text 19"/>
-          <p:cNvSpPr/>
-          <p:nvPr/>
-        </p:nvSpPr>
-        <p:spPr>
-          <a:xfrm>
-            <a:off x="10268712" y="6355080"/>
-            <a:ext cx="1097280" cy="365760"/>
-          </a:xfrm>
-          <a:prstGeom prst="rect">
-            <a:avLst/>
-          </a:prstGeom>
-          <a:noFill/>
-          <a:ln/>
-        </p:spPr>
-        <p:txBody>
-          <a:bodyPr wrap="square" lIns="0" tIns="0" rIns="0" bIns="0" rtlCol="0" anchor="ctr"/>
-          <a:lstStyle/>
-          <a:p>
-            <a:pPr algn="r" indent="0" marL="0">
-              <a:buNone/>
-            </a:pPr>
-            <a:r>
-              <a:rPr lang="en-US" sz="1600" dirty="0">
-                <a:solidFill>
-                  <a:srgbClr val="A3C1AD"/>
-                </a:solidFill>
-                <a:latin typeface="Georgia" pitchFamily="34" charset="0"/>
-                <a:ea typeface="Georgia" pitchFamily="34" charset="-122"/>
-                <a:cs typeface="Georgia" pitchFamily="34" charset="-120"/>
-              </a:rPr>
-              <a:t>02</a:t>
-            </a:r>
-            <a:endParaRPr lang="en-US" sz="1600" dirty="0"/>
+              <a:t>Edouard Manet, A Bar at the Folies-Bergere, 1882</a:t>
+            </a:r>
+            <a:endParaRPr lang="en-US" sz="950" dirty="0"/>
           </a:p>
         </p:txBody>
       </p:sp>
@@ -5133,6 +5673,744 @@
 <file path=ppt/slides/slide6.xml><?xml version="1.0" encoding="utf-8"?>
 <p:sld xmlns:a="http://schemas.openxmlformats.org/drawingml/2006/main" xmlns:r="http://schemas.openxmlformats.org/officeDocument/2006/relationships" xmlns:p="http://schemas.openxmlformats.org/presentationml/2006/main">
   <p:cSld name="Slide 6">
+    <p:bg>
+      <p:bgPr>
+        <a:solidFill>
+          <a:srgbClr val="FAF8F1"/>
+        </a:solidFill>
+      </p:bgPr>
+    </p:bg>
+    <p:spTree>
+      <p:nvGrpSpPr>
+        <p:cNvPr id="1" name=""/>
+        <p:cNvGrpSpPr/>
+        <p:nvPr/>
+      </p:nvGrpSpPr>
+      <p:grpSpPr>
+        <a:xfrm>
+          <a:off x="0" y="0"/>
+          <a:ext cx="0" cy="0"/>
+          <a:chOff x="0" y="0"/>
+          <a:chExt cx="0" cy="0"/>
+        </a:xfrm>
+      </p:grpSpPr>
+      <p:sp>
+        <p:nvSpPr>
+          <p:cNvPr id="2" name="Text 0"/>
+          <p:cNvSpPr/>
+          <p:nvPr/>
+        </p:nvSpPr>
+        <p:spPr>
+          <a:xfrm>
+            <a:off x="822960" y="457200"/>
+            <a:ext cx="6400800" cy="274320"/>
+          </a:xfrm>
+          <a:prstGeom prst="rect">
+            <a:avLst/>
+          </a:prstGeom>
+          <a:noFill/>
+          <a:ln/>
+        </p:spPr>
+        <p:txBody>
+          <a:bodyPr wrap="square" lIns="0" tIns="0" rIns="0" bIns="0" rtlCol="0" anchor="ctr"/>
+          <a:lstStyle/>
+          <a:p>
+            <a:pPr algn="l" indent="0" marL="0">
+              <a:buNone/>
+            </a:pPr>
+            <a:r>
+              <a:rPr lang="en-US" sz="1100" b="1" spc="250" kern="0" dirty="0">
+                <a:solidFill>
+                  <a:srgbClr val="4A6B5D"/>
+                </a:solidFill>
+                <a:latin typeface="Arial" pitchFamily="34" charset="0"/>
+                <a:ea typeface="Arial" pitchFamily="34" charset="-122"/>
+                <a:cs typeface="Arial" pitchFamily="34" charset="-120"/>
+              </a:rPr>
+              <a:t>MULVEY · A CLAIM FROM 1975</a:t>
+            </a:r>
+            <a:endParaRPr lang="en-US" sz="1100" dirty="0"/>
+          </a:p>
+        </p:txBody>
+      </p:sp>
+      <p:sp>
+        <p:nvSpPr>
+          <p:cNvPr id="3" name="Text 1"/>
+          <p:cNvSpPr/>
+          <p:nvPr/>
+        </p:nvSpPr>
+        <p:spPr>
+          <a:xfrm>
+            <a:off x="6793992" y="457200"/>
+            <a:ext cx="4572000" cy="274320"/>
+          </a:xfrm>
+          <a:prstGeom prst="rect">
+            <a:avLst/>
+          </a:prstGeom>
+          <a:noFill/>
+          <a:ln/>
+        </p:spPr>
+        <p:txBody>
+          <a:bodyPr wrap="square" lIns="0" tIns="0" rIns="0" bIns="0" rtlCol="0" anchor="ctr"/>
+          <a:lstStyle/>
+          <a:p>
+            <a:pPr algn="r" indent="0" marL="0">
+              <a:buNone/>
+            </a:pPr>
+            <a:r>
+              <a:rPr lang="en-US" sz="1100" b="1" spc="250" kern="0" dirty="0">
+                <a:solidFill>
+                  <a:srgbClr val="7A7F72"/>
+                </a:solidFill>
+                <a:latin typeface="Arial" pitchFamily="34" charset="0"/>
+                <a:ea typeface="Arial" pitchFamily="34" charset="-122"/>
+                <a:cs typeface="Arial" pitchFamily="34" charset="-120"/>
+              </a:rPr>
+              <a:t>MADE TO BE TESTED</a:t>
+            </a:r>
+            <a:endParaRPr lang="en-US" sz="1100" dirty="0"/>
+          </a:p>
+        </p:txBody>
+      </p:sp>
+      <p:sp>
+        <p:nvSpPr>
+          <p:cNvPr id="4" name="Shape 2"/>
+          <p:cNvSpPr/>
+          <p:nvPr/>
+        </p:nvSpPr>
+        <p:spPr>
+          <a:xfrm>
+            <a:off x="822960" y="786384"/>
+            <a:ext cx="10543032" cy="0"/>
+          </a:xfrm>
+          <a:prstGeom prst="line">
+            <a:avLst/>
+          </a:prstGeom>
+          <a:noFill/>
+          <a:ln w="9525">
+            <a:solidFill>
+              <a:srgbClr val="D9D4C4"/>
+            </a:solidFill>
+            <a:prstDash val="solid"/>
+          </a:ln>
+        </p:spPr>
+      </p:sp>
+      <p:sp>
+        <p:nvSpPr>
+          <p:cNvPr id="5" name="Text 3"/>
+          <p:cNvSpPr/>
+          <p:nvPr/>
+        </p:nvSpPr>
+        <p:spPr>
+          <a:xfrm>
+            <a:off x="822960" y="960120"/>
+            <a:ext cx="6309360" cy="640080"/>
+          </a:xfrm>
+          <a:prstGeom prst="rect">
+            <a:avLst/>
+          </a:prstGeom>
+          <a:noFill/>
+          <a:ln/>
+        </p:spPr>
+        <p:txBody>
+          <a:bodyPr wrap="square" lIns="0" tIns="0" rIns="0" bIns="0" rtlCol="0" anchor="ctr"/>
+          <a:lstStyle/>
+          <a:p>
+            <a:pPr indent="0" marL="0">
+              <a:buNone/>
+            </a:pPr>
+            <a:r>
+              <a:rPr lang="en-US" sz="3000" dirty="0">
+                <a:solidFill>
+                  <a:srgbClr val="24313F"/>
+                </a:solidFill>
+                <a:latin typeface="Georgia" pitchFamily="34" charset="0"/>
+                <a:ea typeface="Georgia" pitchFamily="34" charset="-122"/>
+                <a:cs typeface="Georgia" pitchFamily="34" charset="-120"/>
+              </a:rPr>
+              <a:t>Three looks, classically aligned</a:t>
+            </a:r>
+            <a:endParaRPr lang="en-US" sz="3000" dirty="0"/>
+          </a:p>
+        </p:txBody>
+      </p:sp>
+      <p:sp>
+        <p:nvSpPr>
+          <p:cNvPr id="6" name="Text 4"/>
+          <p:cNvSpPr/>
+          <p:nvPr/>
+        </p:nvSpPr>
+        <p:spPr>
+          <a:xfrm>
+            <a:off x="822960" y="1783080"/>
+            <a:ext cx="731520" cy="457200"/>
+          </a:xfrm>
+          <a:prstGeom prst="rect">
+            <a:avLst/>
+          </a:prstGeom>
+          <a:noFill/>
+          <a:ln/>
+        </p:spPr>
+        <p:txBody>
+          <a:bodyPr wrap="square" lIns="0" tIns="0" rIns="0" bIns="0" rtlCol="0" anchor="ctr"/>
+          <a:lstStyle/>
+          <a:p>
+            <a:pPr indent="0" marL="0">
+              <a:buNone/>
+            </a:pPr>
+            <a:r>
+              <a:rPr lang="en-US" sz="2400" dirty="0">
+                <a:solidFill>
+                  <a:srgbClr val="A3C1AD"/>
+                </a:solidFill>
+                <a:latin typeface="Georgia" pitchFamily="34" charset="0"/>
+                <a:ea typeface="Georgia" pitchFamily="34" charset="-122"/>
+                <a:cs typeface="Georgia" pitchFamily="34" charset="-120"/>
+              </a:rPr>
+              <a:t>01</a:t>
+            </a:r>
+            <a:endParaRPr lang="en-US" sz="2400" dirty="0"/>
+          </a:p>
+        </p:txBody>
+      </p:sp>
+      <p:sp>
+        <p:nvSpPr>
+          <p:cNvPr id="7" name="Text 5"/>
+          <p:cNvSpPr/>
+          <p:nvPr/>
+        </p:nvSpPr>
+        <p:spPr>
+          <a:xfrm>
+            <a:off x="1600200" y="1783080"/>
+            <a:ext cx="5486400" cy="411480"/>
+          </a:xfrm>
+          <a:prstGeom prst="rect">
+            <a:avLst/>
+          </a:prstGeom>
+          <a:noFill/>
+          <a:ln/>
+        </p:spPr>
+        <p:txBody>
+          <a:bodyPr wrap="square" lIns="0" tIns="0" rIns="0" bIns="0" rtlCol="0" anchor="ctr"/>
+          <a:lstStyle/>
+          <a:p>
+            <a:pPr indent="0" marL="0">
+              <a:buNone/>
+            </a:pPr>
+            <a:r>
+              <a:rPr lang="en-US" sz="1900" dirty="0">
+                <a:solidFill>
+                  <a:srgbClr val="4A6B5D"/>
+                </a:solidFill>
+                <a:latin typeface="Georgia" pitchFamily="34" charset="0"/>
+                <a:ea typeface="Georgia" pitchFamily="34" charset="-122"/>
+                <a:cs typeface="Georgia" pitchFamily="34" charset="-120"/>
+              </a:rPr>
+              <a:t>The camera's</a:t>
+            </a:r>
+            <a:endParaRPr lang="en-US" sz="1900" dirty="0"/>
+          </a:p>
+        </p:txBody>
+      </p:sp>
+      <p:sp>
+        <p:nvSpPr>
+          <p:cNvPr id="8" name="Text 6"/>
+          <p:cNvSpPr/>
+          <p:nvPr/>
+        </p:nvSpPr>
+        <p:spPr>
+          <a:xfrm>
+            <a:off x="1600200" y="2194560"/>
+            <a:ext cx="5486400" cy="777240"/>
+          </a:xfrm>
+          <a:prstGeom prst="rect">
+            <a:avLst/>
+          </a:prstGeom>
+          <a:noFill/>
+          <a:ln/>
+        </p:spPr>
+        <p:txBody>
+          <a:bodyPr wrap="square" lIns="0" tIns="0" rIns="0" bIns="0" rtlCol="0" anchor="t"/>
+          <a:lstStyle/>
+          <a:p>
+            <a:pPr indent="0" marL="0">
+              <a:lnSpc>
+                <a:spcPts val="1900"/>
+              </a:lnSpc>
+              <a:buNone/>
+            </a:pPr>
+            <a:r>
+              <a:rPr lang="en-US" sz="1450" dirty="0">
+                <a:solidFill>
+                  <a:srgbClr val="24313F"/>
+                </a:solidFill>
+                <a:latin typeface="Georgia" pitchFamily="34" charset="0"/>
+                <a:ea typeface="Georgia" pitchFamily="34" charset="-122"/>
+                <a:cs typeface="Georgia" pitchFamily="34" charset="-120"/>
+              </a:rPr>
+              <a:t>How the shot itself frames, lingers, and fragments the figure on screen.</a:t>
+            </a:r>
+            <a:endParaRPr lang="en-US" sz="1450" dirty="0"/>
+          </a:p>
+        </p:txBody>
+      </p:sp>
+      <p:sp>
+        <p:nvSpPr>
+          <p:cNvPr id="9" name="Text 7"/>
+          <p:cNvSpPr/>
+          <p:nvPr/>
+        </p:nvSpPr>
+        <p:spPr>
+          <a:xfrm>
+            <a:off x="822960" y="3108960"/>
+            <a:ext cx="731520" cy="457200"/>
+          </a:xfrm>
+          <a:prstGeom prst="rect">
+            <a:avLst/>
+          </a:prstGeom>
+          <a:noFill/>
+          <a:ln/>
+        </p:spPr>
+        <p:txBody>
+          <a:bodyPr wrap="square" lIns="0" tIns="0" rIns="0" bIns="0" rtlCol="0" anchor="ctr"/>
+          <a:lstStyle/>
+          <a:p>
+            <a:pPr indent="0" marL="0">
+              <a:buNone/>
+            </a:pPr>
+            <a:r>
+              <a:rPr lang="en-US" sz="2400" dirty="0">
+                <a:solidFill>
+                  <a:srgbClr val="A3C1AD"/>
+                </a:solidFill>
+                <a:latin typeface="Georgia" pitchFamily="34" charset="0"/>
+                <a:ea typeface="Georgia" pitchFamily="34" charset="-122"/>
+                <a:cs typeface="Georgia" pitchFamily="34" charset="-120"/>
+              </a:rPr>
+              <a:t>02</a:t>
+            </a:r>
+            <a:endParaRPr lang="en-US" sz="2400" dirty="0"/>
+          </a:p>
+        </p:txBody>
+      </p:sp>
+      <p:sp>
+        <p:nvSpPr>
+          <p:cNvPr id="10" name="Text 8"/>
+          <p:cNvSpPr/>
+          <p:nvPr/>
+        </p:nvSpPr>
+        <p:spPr>
+          <a:xfrm>
+            <a:off x="1600200" y="3108960"/>
+            <a:ext cx="5486400" cy="411480"/>
+          </a:xfrm>
+          <a:prstGeom prst="rect">
+            <a:avLst/>
+          </a:prstGeom>
+          <a:noFill/>
+          <a:ln/>
+        </p:spPr>
+        <p:txBody>
+          <a:bodyPr wrap="square" lIns="0" tIns="0" rIns="0" bIns="0" rtlCol="0" anchor="ctr"/>
+          <a:lstStyle/>
+          <a:p>
+            <a:pPr indent="0" marL="0">
+              <a:buNone/>
+            </a:pPr>
+            <a:r>
+              <a:rPr lang="en-US" sz="1900" dirty="0">
+                <a:solidFill>
+                  <a:srgbClr val="4A6B5D"/>
+                </a:solidFill>
+                <a:latin typeface="Georgia" pitchFamily="34" charset="0"/>
+                <a:ea typeface="Georgia" pitchFamily="34" charset="-122"/>
+                <a:cs typeface="Georgia" pitchFamily="34" charset="-120"/>
+              </a:rPr>
+              <a:t>The characters'</a:t>
+            </a:r>
+            <a:endParaRPr lang="en-US" sz="1900" dirty="0"/>
+          </a:p>
+        </p:txBody>
+      </p:sp>
+      <p:sp>
+        <p:nvSpPr>
+          <p:cNvPr id="11" name="Text 9"/>
+          <p:cNvSpPr/>
+          <p:nvPr/>
+        </p:nvSpPr>
+        <p:spPr>
+          <a:xfrm>
+            <a:off x="1600200" y="3520440"/>
+            <a:ext cx="5486400" cy="777240"/>
+          </a:xfrm>
+          <a:prstGeom prst="rect">
+            <a:avLst/>
+          </a:prstGeom>
+          <a:noFill/>
+          <a:ln/>
+        </p:spPr>
+        <p:txBody>
+          <a:bodyPr wrap="square" lIns="0" tIns="0" rIns="0" bIns="0" rtlCol="0" anchor="t"/>
+          <a:lstStyle/>
+          <a:p>
+            <a:pPr indent="0" marL="0">
+              <a:lnSpc>
+                <a:spcPts val="1900"/>
+              </a:lnSpc>
+              <a:buNone/>
+            </a:pPr>
+            <a:r>
+              <a:rPr lang="en-US" sz="1450" dirty="0">
+                <a:solidFill>
+                  <a:srgbClr val="24313F"/>
+                </a:solidFill>
+                <a:latin typeface="Georgia" pitchFamily="34" charset="0"/>
+                <a:ea typeface="Georgia" pitchFamily="34" charset="-122"/>
+                <a:cs typeface="Georgia" pitchFamily="34" charset="-120"/>
+              </a:rPr>
+              <a:t>How people within the story look at one another inside the narrative.</a:t>
+            </a:r>
+            <a:endParaRPr lang="en-US" sz="1450" dirty="0"/>
+          </a:p>
+        </p:txBody>
+      </p:sp>
+      <p:sp>
+        <p:nvSpPr>
+          <p:cNvPr id="12" name="Text 10"/>
+          <p:cNvSpPr/>
+          <p:nvPr/>
+        </p:nvSpPr>
+        <p:spPr>
+          <a:xfrm>
+            <a:off x="822960" y="4434840"/>
+            <a:ext cx="731520" cy="457200"/>
+          </a:xfrm>
+          <a:prstGeom prst="rect">
+            <a:avLst/>
+          </a:prstGeom>
+          <a:noFill/>
+          <a:ln/>
+        </p:spPr>
+        <p:txBody>
+          <a:bodyPr wrap="square" lIns="0" tIns="0" rIns="0" bIns="0" rtlCol="0" anchor="ctr"/>
+          <a:lstStyle/>
+          <a:p>
+            <a:pPr indent="0" marL="0">
+              <a:buNone/>
+            </a:pPr>
+            <a:r>
+              <a:rPr lang="en-US" sz="2400" dirty="0">
+                <a:solidFill>
+                  <a:srgbClr val="A3C1AD"/>
+                </a:solidFill>
+                <a:latin typeface="Georgia" pitchFamily="34" charset="0"/>
+                <a:ea typeface="Georgia" pitchFamily="34" charset="-122"/>
+                <a:cs typeface="Georgia" pitchFamily="34" charset="-120"/>
+              </a:rPr>
+              <a:t>03</a:t>
+            </a:r>
+            <a:endParaRPr lang="en-US" sz="2400" dirty="0"/>
+          </a:p>
+        </p:txBody>
+      </p:sp>
+      <p:sp>
+        <p:nvSpPr>
+          <p:cNvPr id="13" name="Text 11"/>
+          <p:cNvSpPr/>
+          <p:nvPr/>
+        </p:nvSpPr>
+        <p:spPr>
+          <a:xfrm>
+            <a:off x="1600200" y="4434840"/>
+            <a:ext cx="5486400" cy="411480"/>
+          </a:xfrm>
+          <a:prstGeom prst="rect">
+            <a:avLst/>
+          </a:prstGeom>
+          <a:noFill/>
+          <a:ln/>
+        </p:spPr>
+        <p:txBody>
+          <a:bodyPr wrap="square" lIns="0" tIns="0" rIns="0" bIns="0" rtlCol="0" anchor="ctr"/>
+          <a:lstStyle/>
+          <a:p>
+            <a:pPr indent="0" marL="0">
+              <a:buNone/>
+            </a:pPr>
+            <a:r>
+              <a:rPr lang="en-US" sz="1900" dirty="0">
+                <a:solidFill>
+                  <a:srgbClr val="4A6B5D"/>
+                </a:solidFill>
+                <a:latin typeface="Georgia" pitchFamily="34" charset="0"/>
+                <a:ea typeface="Georgia" pitchFamily="34" charset="-122"/>
+                <a:cs typeface="Georgia" pitchFamily="34" charset="-120"/>
+              </a:rPr>
+              <a:t>The audience's</a:t>
+            </a:r>
+            <a:endParaRPr lang="en-US" sz="1900" dirty="0"/>
+          </a:p>
+        </p:txBody>
+      </p:sp>
+      <p:sp>
+        <p:nvSpPr>
+          <p:cNvPr id="14" name="Text 12"/>
+          <p:cNvSpPr/>
+          <p:nvPr/>
+        </p:nvSpPr>
+        <p:spPr>
+          <a:xfrm>
+            <a:off x="1600200" y="4846320"/>
+            <a:ext cx="5486400" cy="777240"/>
+          </a:xfrm>
+          <a:prstGeom prst="rect">
+            <a:avLst/>
+          </a:prstGeom>
+          <a:noFill/>
+          <a:ln/>
+        </p:spPr>
+        <p:txBody>
+          <a:bodyPr wrap="square" lIns="0" tIns="0" rIns="0" bIns="0" rtlCol="0" anchor="t"/>
+          <a:lstStyle/>
+          <a:p>
+            <a:pPr indent="0" marL="0">
+              <a:lnSpc>
+                <a:spcPts val="1900"/>
+              </a:lnSpc>
+              <a:buNone/>
+            </a:pPr>
+            <a:r>
+              <a:rPr lang="en-US" sz="1450" dirty="0">
+                <a:solidFill>
+                  <a:srgbClr val="24313F"/>
+                </a:solidFill>
+                <a:latin typeface="Georgia" pitchFamily="34" charset="0"/>
+                <a:ea typeface="Georgia" pitchFamily="34" charset="-122"/>
+                <a:cs typeface="Georgia" pitchFamily="34" charset="-120"/>
+              </a:rPr>
+              <a:t>How we are positioned to look, and whose looking we are lent.</a:t>
+            </a:r>
+            <a:endParaRPr lang="en-US" sz="1450" dirty="0"/>
+          </a:p>
+        </p:txBody>
+      </p:sp>
+      <p:pic>
+        <p:nvPicPr>
+          <p:cNvPr id="15" name="Image 0" descr="/Users/dogan/Documents/Vaults/Courses/wiki/classes/media-studies/decks/_build/img/crops/rearwindow-lens_a967.jpg">    </p:cNvPr>
+          <p:cNvPicPr>
+            <a:picLocks noChangeAspect="1"/>
+          </p:cNvPicPr>
+          <p:nvPr/>
+        </p:nvPicPr>
+        <p:blipFill>
+          <a:blip r:embed="rId1"/>
+          <a:stretch>
+            <a:fillRect/>
+          </a:stretch>
+        </p:blipFill>
+        <p:spPr>
+          <a:xfrm>
+            <a:off x="7360920" y="1097280"/>
+            <a:ext cx="4023360" cy="4160520"/>
+          </a:xfrm>
+          <a:prstGeom prst="rect">
+            <a:avLst/>
+          </a:prstGeom>
+        </p:spPr>
+      </p:pic>
+      <p:sp>
+        <p:nvSpPr>
+          <p:cNvPr id="16" name="Text 13"/>
+          <p:cNvSpPr/>
+          <p:nvPr/>
+        </p:nvSpPr>
+        <p:spPr>
+          <a:xfrm>
+            <a:off x="7360920" y="5303520"/>
+            <a:ext cx="4023360" cy="457200"/>
+          </a:xfrm>
+          <a:prstGeom prst="rect">
+            <a:avLst/>
+          </a:prstGeom>
+          <a:noFill/>
+          <a:ln/>
+        </p:spPr>
+        <p:txBody>
+          <a:bodyPr wrap="square" lIns="0" tIns="0" rIns="0" bIns="0" rtlCol="0" anchor="t"/>
+          <a:lstStyle/>
+          <a:p>
+            <a:pPr algn="ctr" indent="0" marL="0">
+              <a:lnSpc>
+                <a:spcPts val="1300"/>
+              </a:lnSpc>
+              <a:buNone/>
+            </a:pPr>
+            <a:r>
+              <a:rPr lang="en-US" sz="1000" dirty="0">
+                <a:solidFill>
+                  <a:srgbClr val="7A7F72"/>
+                </a:solidFill>
+                <a:latin typeface="Arial" pitchFamily="34" charset="0"/>
+                <a:ea typeface="Arial" pitchFamily="34" charset="-122"/>
+                <a:cs typeface="Arial" pitchFamily="34" charset="-120"/>
+              </a:rPr>
+              <a:t>Rear Window (1954): the audience's surrogate, lens raised</a:t>
+            </a:r>
+            <a:endParaRPr lang="en-US" sz="1000" dirty="0"/>
+          </a:p>
+        </p:txBody>
+      </p:sp>
+      <p:sp>
+        <p:nvSpPr>
+          <p:cNvPr id="17" name="Text 14"/>
+          <p:cNvSpPr/>
+          <p:nvPr/>
+        </p:nvSpPr>
+        <p:spPr>
+          <a:xfrm>
+            <a:off x="822960" y="5806440"/>
+            <a:ext cx="10543032" cy="457200"/>
+          </a:xfrm>
+          <a:prstGeom prst="rect">
+            <a:avLst/>
+          </a:prstGeom>
+          <a:noFill/>
+          <a:ln/>
+        </p:spPr>
+        <p:txBody>
+          <a:bodyPr wrap="square" lIns="0" tIns="0" rIns="0" bIns="0" rtlCol="0" anchor="ctr"/>
+          <a:lstStyle/>
+          <a:p>
+            <a:pPr indent="0" marL="0">
+              <a:buNone/>
+            </a:pPr>
+            <a:r>
+              <a:rPr lang="en-US" sz="1250" i="1" dirty="0">
+                <a:solidFill>
+                  <a:srgbClr val="7A7F72"/>
+                </a:solidFill>
+                <a:latin typeface="Arial" pitchFamily="34" charset="0"/>
+                <a:ea typeface="Arial" pitchFamily="34" charset="-122"/>
+                <a:cs typeface="Arial" pitchFamily="34" charset="-120"/>
+              </a:rPr>
+              <a:t>Classically, all three align on woman as spectacle. This is a claim from 1975 about a system, made to be tested, not recited.</a:t>
+            </a:r>
+            <a:endParaRPr lang="en-US" sz="1250" dirty="0"/>
+          </a:p>
+        </p:txBody>
+      </p:sp>
+      <p:sp>
+        <p:nvSpPr>
+          <p:cNvPr id="18" name="Shape 15"/>
+          <p:cNvSpPr/>
+          <p:nvPr/>
+        </p:nvSpPr>
+        <p:spPr>
+          <a:xfrm>
+            <a:off x="822960" y="6382512"/>
+            <a:ext cx="10543032" cy="0"/>
+          </a:xfrm>
+          <a:prstGeom prst="line">
+            <a:avLst/>
+          </a:prstGeom>
+          <a:noFill/>
+          <a:ln w="9525">
+            <a:solidFill>
+              <a:srgbClr val="D9D4C4"/>
+            </a:solidFill>
+            <a:prstDash val="solid"/>
+          </a:ln>
+        </p:spPr>
+      </p:sp>
+      <p:sp>
+        <p:nvSpPr>
+          <p:cNvPr id="19" name="Text 16"/>
+          <p:cNvSpPr/>
+          <p:nvPr/>
+        </p:nvSpPr>
+        <p:spPr>
+          <a:xfrm>
+            <a:off x="822960" y="6419088"/>
+            <a:ext cx="7315200" cy="274320"/>
+          </a:xfrm>
+          <a:prstGeom prst="rect">
+            <a:avLst/>
+          </a:prstGeom>
+          <a:noFill/>
+          <a:ln/>
+        </p:spPr>
+        <p:txBody>
+          <a:bodyPr wrap="square" lIns="0" tIns="0" rIns="0" bIns="0" rtlCol="0" anchor="ctr"/>
+          <a:lstStyle/>
+          <a:p>
+            <a:pPr indent="0" marL="0">
+              <a:buNone/>
+            </a:pPr>
+            <a:r>
+              <a:rPr lang="en-US" sz="900" spc="150" kern="0" dirty="0">
+                <a:solidFill>
+                  <a:srgbClr val="7A7F72"/>
+                </a:solidFill>
+                <a:latin typeface="Arial" pitchFamily="34" charset="0"/>
+                <a:ea typeface="Arial" pitchFamily="34" charset="-122"/>
+                <a:cs typeface="Arial" pitchFamily="34" charset="-120"/>
+              </a:rPr>
+              <a:t>MEDIA STUDIES 9607 · SEMESTER I</a:t>
+            </a:r>
+            <a:endParaRPr lang="en-US" sz="900" dirty="0"/>
+          </a:p>
+        </p:txBody>
+      </p:sp>
+      <p:sp>
+        <p:nvSpPr>
+          <p:cNvPr id="20" name="Text 17"/>
+          <p:cNvSpPr/>
+          <p:nvPr/>
+        </p:nvSpPr>
+        <p:spPr>
+          <a:xfrm>
+            <a:off x="10268712" y="6355080"/>
+            <a:ext cx="1097280" cy="365760"/>
+          </a:xfrm>
+          <a:prstGeom prst="rect">
+            <a:avLst/>
+          </a:prstGeom>
+          <a:noFill/>
+          <a:ln/>
+        </p:spPr>
+        <p:txBody>
+          <a:bodyPr wrap="square" lIns="0" tIns="0" rIns="0" bIns="0" rtlCol="0" anchor="ctr"/>
+          <a:lstStyle/>
+          <a:p>
+            <a:pPr algn="r" indent="0" marL="0">
+              <a:buNone/>
+            </a:pPr>
+            <a:r>
+              <a:rPr lang="en-US" sz="1600" dirty="0">
+                <a:solidFill>
+                  <a:srgbClr val="A3C1AD"/>
+                </a:solidFill>
+                <a:latin typeface="Georgia" pitchFamily="34" charset="0"/>
+                <a:ea typeface="Georgia" pitchFamily="34" charset="-122"/>
+                <a:cs typeface="Georgia" pitchFamily="34" charset="-120"/>
+              </a:rPr>
+              <a:t>03</a:t>
+            </a:r>
+            <a:endParaRPr lang="en-US" sz="1600" dirty="0"/>
+          </a:p>
+        </p:txBody>
+      </p:sp>
+    </p:spTree>
+  </p:cSld>
+  <p:clrMapOvr>
+    <a:masterClrMapping/>
+  </p:clrMapOvr>
+</p:sld>
+</file>
+
+<file path=ppt/slides/slide7.xml><?xml version="1.0" encoding="utf-8"?>
+<p:sld xmlns:a="http://schemas.openxmlformats.org/drawingml/2006/main" xmlns:r="http://schemas.openxmlformats.org/officeDocument/2006/relationships" xmlns:p="http://schemas.openxmlformats.org/presentationml/2006/main">
+  <p:cSld name="Slide 7">
     <p:bg>
       <p:bgPr>
         <a:solidFill>
@@ -5305,9 +6583,9 @@
 </p:sld>
 </file>
 
-<file path=ppt/slides/slide7.xml><?xml version="1.0" encoding="utf-8"?>
+<file path=ppt/slides/slide8.xml><?xml version="1.0" encoding="utf-8"?>
 <p:sld xmlns:a="http://schemas.openxmlformats.org/drawingml/2006/main" xmlns:r="http://schemas.openxmlformats.org/officeDocument/2006/relationships" xmlns:p="http://schemas.openxmlformats.org/presentationml/2006/main">
-  <p:cSld name="Slide 7">
+  <p:cSld name="Slide 8">
     <p:bg>
       <p:bgPr>
         <a:solidFill>
@@ -5438,8 +6716,8 @@
         </p:nvSpPr>
         <p:spPr>
           <a:xfrm>
-            <a:off x="822960" y="1280160"/>
-            <a:ext cx="10543032" cy="914400"/>
+            <a:off x="822960" y="960120"/>
+            <a:ext cx="6309360" cy="731520"/>
           </a:xfrm>
           <a:prstGeom prst="rect">
             <a:avLst/>
@@ -5455,7 +6733,7 @@
               <a:buNone/>
             </a:pPr>
             <a:r>
-              <a:rPr lang="en-US" sz="4000" dirty="0">
+              <a:rPr lang="en-US" sz="3400" dirty="0">
                 <a:solidFill>
                   <a:srgbClr val="24313F"/>
                 </a:solidFill>
@@ -5465,7 +6743,7 @@
               </a:rPr>
               <a:t>Hold, shift, or invert?</a:t>
             </a:r>
-            <a:endParaRPr lang="en-US" sz="4000" dirty="0"/>
+            <a:endParaRPr lang="en-US" sz="3400" dirty="0"/>
           </a:p>
         </p:txBody>
       </p:sp>
@@ -5477,7 +6755,7 @@
         </p:nvSpPr>
         <p:spPr>
           <a:xfrm>
-            <a:off x="822960" y="2514600"/>
+            <a:off x="822960" y="1828800"/>
             <a:ext cx="914400" cy="0"/>
           </a:xfrm>
           <a:prstGeom prst="line">
@@ -5500,8 +6778,8 @@
         </p:nvSpPr>
         <p:spPr>
           <a:xfrm>
-            <a:off x="822960" y="2743200"/>
-            <a:ext cx="9966960" cy="2194560"/>
+            <a:off x="822960" y="2057400"/>
+            <a:ext cx="6217920" cy="2834640"/>
           </a:xfrm>
           <a:prstGeom prst="rect">
             <a:avLst/>
@@ -5515,12 +6793,12 @@
           <a:p>
             <a:pPr indent="0" marL="0">
               <a:lnSpc>
-                <a:spcPts val="2800"/>
+                <a:spcPts val="2300"/>
               </a:lnSpc>
               <a:buNone/>
             </a:pPr>
             <a:r>
-              <a:rPr lang="en-US" sz="2000" dirty="0">
+              <a:rPr lang="en-US" sz="1600" dirty="0">
                 <a:solidFill>
                   <a:srgbClr val="24313F"/>
                 </a:solidFill>
@@ -5530,7 +6808,7 @@
               </a:rPr>
               <a:t>Take a genre pair, one text before 2000 and one after 2018, with a comparable scene function so the only variable is era. Gather timecoded evidence for the camera-look, the character-look, and audience positioning in each. Then reach a verdict with the evidence attached: did the gaze hold, shift, or turn out to be the same structure pointed elsewhere?</a:t>
             </a:r>
-            <a:endParaRPr lang="en-US" sz="2000" dirty="0"/>
+            <a:endParaRPr lang="en-US" sz="1600" dirty="0"/>
           </a:p>
         </p:txBody>
       </p:sp>
@@ -5542,24 +6820,27 @@
         </p:nvSpPr>
         <p:spPr>
           <a:xfrm>
-            <a:off x="822960" y="5120640"/>
-            <a:ext cx="9966960" cy="365760"/>
-          </a:xfrm>
-          <a:prstGeom prst="rect">
-            <a:avLst/>
-          </a:prstGeom>
-          <a:noFill/>
-          <a:ln/>
-        </p:spPr>
-        <p:txBody>
-          <a:bodyPr wrap="square" lIns="0" tIns="0" rIns="0" bIns="0" rtlCol="0" anchor="ctr"/>
+            <a:off x="822960" y="5029200"/>
+            <a:ext cx="6217920" cy="685800"/>
+          </a:xfrm>
+          <a:prstGeom prst="rect">
+            <a:avLst/>
+          </a:prstGeom>
+          <a:noFill/>
+          <a:ln/>
+        </p:spPr>
+        <p:txBody>
+          <a:bodyPr wrap="square" lIns="0" tIns="0" rIns="0" bIns="0" rtlCol="0" anchor="t"/>
           <a:lstStyle/>
           <a:p>
             <a:pPr indent="0" marL="0">
-              <a:buNone/>
-            </a:pPr>
-            <a:r>
-              <a:rPr lang="en-US" sz="1250" i="1" dirty="0">
+              <a:lnSpc>
+                <a:spcPts val="1600"/>
+              </a:lnSpc>
+              <a:buNone/>
+            </a:pPr>
+            <a:r>
+              <a:rPr lang="en-US" sz="1200" i="1" dirty="0">
                 <a:solidFill>
                   <a:srgbClr val="7A7F72"/>
                 </a:solidFill>
@@ -5569,7 +6850,7 @@
               </a:rPr>
               <a:t>Every verdict must survive one structured counter: challenger named in advance, evidence required.</a:t>
             </a:r>
-            <a:endParaRPr lang="en-US" sz="1250" dirty="0"/>
+            <a:endParaRPr lang="en-US" sz="1200" dirty="0"/>
           </a:p>
         </p:txBody>
       </p:sp>
@@ -5581,13 +6862,15 @@
         </p:nvSpPr>
         <p:spPr>
           <a:xfrm>
-            <a:off x="822960" y="6382512"/>
-            <a:ext cx="10543032" cy="0"/>
-          </a:xfrm>
-          <a:prstGeom prst="line">
-            <a:avLst/>
-          </a:prstGeom>
-          <a:noFill/>
+            <a:off x="7086600" y="1143000"/>
+            <a:ext cx="2103120" cy="4297680"/>
+          </a:xfrm>
+          <a:prstGeom prst="rect">
+            <a:avLst/>
+          </a:prstGeom>
+          <a:solidFill>
+            <a:srgbClr val="FAF8F1"/>
+          </a:solidFill>
           <a:ln w="9525">
             <a:solidFill>
               <a:srgbClr val="D9D4C4"/>
@@ -5596,32 +6879,108 @@
           </a:ln>
         </p:spPr>
       </p:sp>
-      <p:sp>
-        <p:nvSpPr>
-          <p:cNvPr id="10" name="Text 8"/>
-          <p:cNvSpPr/>
-          <p:nvPr/>
-        </p:nvSpPr>
-        <p:spPr>
-          <a:xfrm>
-            <a:off x="822960" y="6419088"/>
-            <a:ext cx="7315200" cy="274320"/>
-          </a:xfrm>
-          <a:prstGeom prst="rect">
-            <a:avLst/>
-          </a:prstGeom>
-          <a:noFill/>
-          <a:ln/>
-        </p:spPr>
-        <p:txBody>
-          <a:bodyPr wrap="square" lIns="0" tIns="0" rIns="0" bIns="0" rtlCol="0" anchor="ctr"/>
-          <a:lstStyle/>
-          <a:p>
-            <a:pPr indent="0" marL="0">
-              <a:buNone/>
-            </a:pPr>
-            <a:r>
-              <a:rPr lang="en-US" sz="900" spc="150" kern="0" dirty="0">
+      <p:pic>
+        <p:nvPicPr>
+          <p:cNvPr id="10" name="Image 0" descr="/Users/dogan/Documents/Vaults/Courses/wiki/classes/media-studies/decks/_build/img/poster-drno.jpg">    </p:cNvPr>
+          <p:cNvPicPr>
+            <a:picLocks noChangeAspect="1"/>
+          </p:cNvPicPr>
+          <p:nvPr/>
+        </p:nvPicPr>
+        <p:blipFill>
+          <a:blip r:embed="rId1"/>
+          <a:stretch>
+            <a:fillRect/>
+          </a:stretch>
+        </p:blipFill>
+        <p:spPr>
+          <a:xfrm>
+            <a:off x="7141464" y="1780168"/>
+            <a:ext cx="1993392" cy="3023345"/>
+          </a:xfrm>
+          <a:prstGeom prst="rect">
+            <a:avLst/>
+          </a:prstGeom>
+        </p:spPr>
+      </p:pic>
+      <p:sp>
+        <p:nvSpPr>
+          <p:cNvPr id="11" name="Shape 8"/>
+          <p:cNvSpPr/>
+          <p:nvPr/>
+        </p:nvSpPr>
+        <p:spPr>
+          <a:xfrm>
+            <a:off x="9326880" y="1143000"/>
+            <a:ext cx="2103120" cy="4297680"/>
+          </a:xfrm>
+          <a:prstGeom prst="rect">
+            <a:avLst/>
+          </a:prstGeom>
+          <a:solidFill>
+            <a:srgbClr val="FAF8F1"/>
+          </a:solidFill>
+          <a:ln w="9525">
+            <a:solidFill>
+              <a:srgbClr val="D9D4C4"/>
+            </a:solidFill>
+            <a:prstDash val="solid"/>
+          </a:ln>
+        </p:spPr>
+      </p:sp>
+      <p:pic>
+        <p:nvPicPr>
+          <p:cNvPr id="12" name="Image 1" descr="/Users/dogan/Documents/Vaults/Courses/wiki/classes/media-studies/decks/_build/img/poster-nttd.jpg">    </p:cNvPr>
+          <p:cNvPicPr>
+            <a:picLocks noChangeAspect="1"/>
+          </p:cNvPicPr>
+          <p:nvPr/>
+        </p:nvPicPr>
+        <p:blipFill>
+          <a:blip r:embed="rId2"/>
+          <a:stretch>
+            <a:fillRect/>
+          </a:stretch>
+        </p:blipFill>
+        <p:spPr>
+          <a:xfrm>
+            <a:off x="9381744" y="1815982"/>
+            <a:ext cx="1993392" cy="2951716"/>
+          </a:xfrm>
+          <a:prstGeom prst="rect">
+            <a:avLst/>
+          </a:prstGeom>
+        </p:spPr>
+      </p:pic>
+      <p:sp>
+        <p:nvSpPr>
+          <p:cNvPr id="13" name="Text 9"/>
+          <p:cNvSpPr/>
+          <p:nvPr/>
+        </p:nvSpPr>
+        <p:spPr>
+          <a:xfrm>
+            <a:off x="7086600" y="5486400"/>
+            <a:ext cx="4343400" cy="457200"/>
+          </a:xfrm>
+          <a:prstGeom prst="rect">
+            <a:avLst/>
+          </a:prstGeom>
+          <a:noFill/>
+          <a:ln/>
+        </p:spPr>
+        <p:txBody>
+          <a:bodyPr wrap="square" lIns="0" tIns="0" rIns="0" bIns="0" rtlCol="0" anchor="t"/>
+          <a:lstStyle/>
+          <a:p>
+            <a:pPr algn="ctr" indent="0" marL="0">
+              <a:lnSpc>
+                <a:spcPts val="1300"/>
+              </a:lnSpc>
+              <a:buNone/>
+            </a:pPr>
+            <a:r>
+              <a:rPr lang="en-US" sz="1000" dirty="0">
                 <a:solidFill>
                   <a:srgbClr val="7A7F72"/>
                 </a:solidFill>
@@ -5629,6 +6988,68 @@
                 <a:ea typeface="Arial" pitchFamily="34" charset="-122"/>
                 <a:cs typeface="Arial" pitchFamily="34" charset="-120"/>
               </a:rPr>
+              <a:t>One franchise, six decades: Dr. No (1962), No Time to Die (2021)</a:t>
+            </a:r>
+            <a:endParaRPr lang="en-US" sz="1000" dirty="0"/>
+          </a:p>
+        </p:txBody>
+      </p:sp>
+      <p:sp>
+        <p:nvSpPr>
+          <p:cNvPr id="14" name="Shape 10"/>
+          <p:cNvSpPr/>
+          <p:nvPr/>
+        </p:nvSpPr>
+        <p:spPr>
+          <a:xfrm>
+            <a:off x="822960" y="6382512"/>
+            <a:ext cx="10543032" cy="0"/>
+          </a:xfrm>
+          <a:prstGeom prst="line">
+            <a:avLst/>
+          </a:prstGeom>
+          <a:noFill/>
+          <a:ln w="9525">
+            <a:solidFill>
+              <a:srgbClr val="D9D4C4"/>
+            </a:solidFill>
+            <a:prstDash val="solid"/>
+          </a:ln>
+        </p:spPr>
+      </p:sp>
+      <p:sp>
+        <p:nvSpPr>
+          <p:cNvPr id="15" name="Text 11"/>
+          <p:cNvSpPr/>
+          <p:nvPr/>
+        </p:nvSpPr>
+        <p:spPr>
+          <a:xfrm>
+            <a:off x="822960" y="6419088"/>
+            <a:ext cx="7315200" cy="274320"/>
+          </a:xfrm>
+          <a:prstGeom prst="rect">
+            <a:avLst/>
+          </a:prstGeom>
+          <a:noFill/>
+          <a:ln/>
+        </p:spPr>
+        <p:txBody>
+          <a:bodyPr wrap="square" lIns="0" tIns="0" rIns="0" bIns="0" rtlCol="0" anchor="ctr"/>
+          <a:lstStyle/>
+          <a:p>
+            <a:pPr indent="0" marL="0">
+              <a:buNone/>
+            </a:pPr>
+            <a:r>
+              <a:rPr lang="en-US" sz="900" spc="150" kern="0" dirty="0">
+                <a:solidFill>
+                  <a:srgbClr val="7A7F72"/>
+                </a:solidFill>
+                <a:latin typeface="Arial" pitchFamily="34" charset="0"/>
+                <a:ea typeface="Arial" pitchFamily="34" charset="-122"/>
+                <a:cs typeface="Arial" pitchFamily="34" charset="-120"/>
+              </a:rPr>
               <a:t>MEDIA STUDIES 9607 · SEMESTER I</a:t>
             </a:r>
             <a:endParaRPr lang="en-US" sz="900" dirty="0"/>
@@ -5637,7 +7058,7 @@
       </p:sp>
       <p:sp>
         <p:nvSpPr>
-          <p:cNvPr id="11" name="Text 9"/>
+          <p:cNvPr id="16" name="Text 12"/>
           <p:cNvSpPr/>
           <p:nvPr/>
         </p:nvSpPr>
@@ -5668,7 +7089,7 @@
                 <a:ea typeface="Georgia" pitchFamily="34" charset="-122"/>
                 <a:cs typeface="Georgia" pitchFamily="34" charset="-120"/>
               </a:rPr>
-              <a:t>03</a:t>
+              <a:t>04</a:t>
             </a:r>
             <a:endParaRPr lang="en-US" sz="1600" dirty="0"/>
           </a:p>
@@ -5682,9 +7103,9 @@
 </p:sld>
 </file>
 
-<file path=ppt/slides/slide8.xml><?xml version="1.0" encoding="utf-8"?>
+<file path=ppt/slides/slide9.xml><?xml version="1.0" encoding="utf-8"?>
 <p:sld xmlns:a="http://schemas.openxmlformats.org/drawingml/2006/main" xmlns:r="http://schemas.openxmlformats.org/officeDocument/2006/relationships" xmlns:p="http://schemas.openxmlformats.org/presentationml/2006/main">
-  <p:cSld name="Slide 8">
+  <p:cSld name="Slide 9">
     <p:bg>
       <p:bgPr>
         <a:solidFill>
@@ -5846,238 +7267,6 @@
               <a:t>bell hooks, The Oppositional Gaze, 1992</a:t>
             </a:r>
             <a:endParaRPr lang="en-US" sz="1400" dirty="0"/>
-          </a:p>
-        </p:txBody>
-      </p:sp>
-    </p:spTree>
-  </p:cSld>
-  <p:clrMapOvr>
-    <a:masterClrMapping/>
-  </p:clrMapOvr>
-</p:sld>
-</file>
-
-<file path=ppt/slides/slide9.xml><?xml version="1.0" encoding="utf-8"?>
-<p:sld xmlns:a="http://schemas.openxmlformats.org/drawingml/2006/main" xmlns:r="http://schemas.openxmlformats.org/officeDocument/2006/relationships" xmlns:p="http://schemas.openxmlformats.org/presentationml/2006/main">
-  <p:cSld name="Slide 9">
-    <p:spTree>
-      <p:nvGrpSpPr>
-        <p:cNvPr id="1" name=""/>
-        <p:cNvGrpSpPr/>
-        <p:nvPr/>
-      </p:nvGrpSpPr>
-      <p:grpSpPr>
-        <a:xfrm>
-          <a:off x="0" y="0"/>
-          <a:ext cx="0" cy="0"/>
-          <a:chOff x="0" y="0"/>
-          <a:chExt cx="0" cy="0"/>
-        </a:xfrm>
-      </p:grpSpPr>
-      <p:pic>
-        <p:nvPicPr>
-          <p:cNvPr id="2" name="Image 0" descr="/Users/dogan/Documents/Vaults/Courses/wiki/classes/media-studies/decks/_build/img/crops/manet-olympia_a1777.jpg">    </p:cNvPr>
-          <p:cNvPicPr>
-            <a:picLocks noChangeAspect="1"/>
-          </p:cNvPicPr>
-          <p:nvPr/>
-        </p:nvPicPr>
-        <p:blipFill>
-          <a:blip r:embed="rId1"/>
-          <a:stretch>
-            <a:fillRect/>
-          </a:stretch>
-        </p:blipFill>
-        <p:spPr>
-          <a:xfrm>
-            <a:off x="0" y="0"/>
-            <a:ext cx="12188952" cy="6858000"/>
-          </a:xfrm>
-          <a:prstGeom prst="rect">
-            <a:avLst/>
-          </a:prstGeom>
-        </p:spPr>
-      </p:pic>
-      <p:sp>
-        <p:nvSpPr>
-          <p:cNvPr id="3" name="Shape 0"/>
-          <p:cNvSpPr/>
-          <p:nvPr/>
-        </p:nvSpPr>
-        <p:spPr>
-          <a:xfrm>
-            <a:off x="502920" y="502920"/>
-            <a:ext cx="5120640" cy="502920"/>
-          </a:xfrm>
-          <a:prstGeom prst="rect">
-            <a:avLst/>
-          </a:prstGeom>
-          <a:solidFill>
-            <a:srgbClr val="FAF8F1"/>
-          </a:solidFill>
-          <a:ln/>
-        </p:spPr>
-      </p:sp>
-      <p:sp>
-        <p:nvSpPr>
-          <p:cNvPr id="4" name="Text 1"/>
-          <p:cNvSpPr/>
-          <p:nvPr/>
-        </p:nvSpPr>
-        <p:spPr>
-          <a:xfrm>
-            <a:off x="704088" y="521208"/>
-            <a:ext cx="4846320" cy="274320"/>
-          </a:xfrm>
-          <a:prstGeom prst="rect">
-            <a:avLst/>
-          </a:prstGeom>
-          <a:noFill/>
-          <a:ln/>
-        </p:spPr>
-        <p:txBody>
-          <a:bodyPr wrap="square" lIns="0" tIns="0" rIns="0" bIns="0" rtlCol="0" anchor="ctr"/>
-          <a:lstStyle/>
-          <a:p>
-            <a:pPr algn="l" indent="0" marL="0">
-              <a:buNone/>
-            </a:pPr>
-            <a:r>
-              <a:rPr lang="en-US" sz="1100" b="1" spc="250" kern="0" dirty="0">
-                <a:solidFill>
-                  <a:srgbClr val="4A6B5D"/>
-                </a:solidFill>
-                <a:latin typeface="Arial" pitchFamily="34" charset="0"/>
-                <a:ea typeface="Arial" pitchFamily="34" charset="-122"/>
-                <a:cs typeface="Arial" pitchFamily="34" charset="-120"/>
-              </a:rPr>
-              <a:t>A LOOK SENT BACK</a:t>
-            </a:r>
-            <a:endParaRPr lang="en-US" sz="1100" dirty="0"/>
-          </a:p>
-        </p:txBody>
-      </p:sp>
-      <p:sp>
-        <p:nvSpPr>
-          <p:cNvPr id="5" name="Shape 2"/>
-          <p:cNvSpPr/>
-          <p:nvPr/>
-        </p:nvSpPr>
-        <p:spPr>
-          <a:xfrm>
-            <a:off x="457200" y="5230368"/>
-            <a:ext cx="8778240" cy="1243584"/>
-          </a:xfrm>
-          <a:prstGeom prst="rect">
-            <a:avLst/>
-          </a:prstGeom>
-          <a:solidFill>
-            <a:srgbClr val="FAF8F1"/>
-          </a:solidFill>
-          <a:ln/>
-        </p:spPr>
-      </p:sp>
-      <p:sp>
-        <p:nvSpPr>
-          <p:cNvPr id="6" name="Shape 3"/>
-          <p:cNvSpPr/>
-          <p:nvPr/>
-        </p:nvSpPr>
-        <p:spPr>
-          <a:xfrm>
-            <a:off x="676656" y="5468112"/>
-            <a:ext cx="731520" cy="0"/>
-          </a:xfrm>
-          <a:prstGeom prst="line">
-            <a:avLst/>
-          </a:prstGeom>
-          <a:noFill/>
-          <a:ln w="28575">
-            <a:solidFill>
-              <a:srgbClr val="8C3A38"/>
-            </a:solidFill>
-            <a:prstDash val="solid"/>
-          </a:ln>
-        </p:spPr>
-      </p:sp>
-      <p:sp>
-        <p:nvSpPr>
-          <p:cNvPr id="7" name="Text 4"/>
-          <p:cNvSpPr/>
-          <p:nvPr/>
-        </p:nvSpPr>
-        <p:spPr>
-          <a:xfrm>
-            <a:off x="676656" y="5541264"/>
-            <a:ext cx="8339328" cy="585216"/>
-          </a:xfrm>
-          <a:prstGeom prst="rect">
-            <a:avLst/>
-          </a:prstGeom>
-          <a:noFill/>
-          <a:ln/>
-        </p:spPr>
-        <p:txBody>
-          <a:bodyPr wrap="square" lIns="0" tIns="0" rIns="0" bIns="0" rtlCol="0" anchor="t"/>
-          <a:lstStyle/>
-          <a:p>
-            <a:pPr indent="0" marL="0">
-              <a:lnSpc>
-                <a:spcPts val="2200"/>
-              </a:lnSpc>
-              <a:buNone/>
-            </a:pPr>
-            <a:r>
-              <a:rPr lang="en-US" sz="1800" dirty="0">
-                <a:solidFill>
-                  <a:srgbClr val="24313F"/>
-                </a:solidFill>
-                <a:latin typeface="Georgia" pitchFamily="34" charset="0"/>
-                <a:ea typeface="Georgia" pitchFamily="34" charset="-122"/>
-                <a:cs typeface="Georgia" pitchFamily="34" charset="-120"/>
-              </a:rPr>
-              <a:t>She is looked at, and she looks straight back, refusing to be only an image.</a:t>
-            </a:r>
-            <a:endParaRPr lang="en-US" sz="1800" dirty="0"/>
-          </a:p>
-        </p:txBody>
-      </p:sp>
-      <p:sp>
-        <p:nvSpPr>
-          <p:cNvPr id="8" name="Text 5"/>
-          <p:cNvSpPr/>
-          <p:nvPr/>
-        </p:nvSpPr>
-        <p:spPr>
-          <a:xfrm>
-            <a:off x="676656" y="6181344"/>
-            <a:ext cx="8339328" cy="256032"/>
-          </a:xfrm>
-          <a:prstGeom prst="rect">
-            <a:avLst/>
-          </a:prstGeom>
-          <a:noFill/>
-          <a:ln/>
-        </p:spPr>
-        <p:txBody>
-          <a:bodyPr wrap="square" lIns="0" tIns="0" rIns="0" bIns="0" rtlCol="0" anchor="ctr"/>
-          <a:lstStyle/>
-          <a:p>
-            <a:pPr indent="0" marL="0">
-              <a:buNone/>
-            </a:pPr>
-            <a:r>
-              <a:rPr lang="en-US" sz="950" spc="50" kern="0" dirty="0">
-                <a:solidFill>
-                  <a:srgbClr val="7A7F72"/>
-                </a:solidFill>
-                <a:latin typeface="Arial" pitchFamily="34" charset="0"/>
-                <a:ea typeface="Arial" pitchFamily="34" charset="-122"/>
-                <a:cs typeface="Arial" pitchFamily="34" charset="-120"/>
-              </a:rPr>
-              <a:t>Edouard Manet, Olympia, 1863</a:t>
-            </a:r>
-            <a:endParaRPr lang="en-US" sz="950" dirty="0"/>
           </a:p>
         </p:txBody>
       </p:sp>

--- a/content/decks/media-studies/media-studies-s1-lesson-12-the-gaze.pptx
+++ b/content/decks/media-studies/media-studies-s1-lesson-12-the-gaze.pptx
@@ -2509,12 +2509,29 @@
           <a:p>
             <a:pPr indent="0" marL="0">
               <a:lnSpc>
-                <a:spcPts val="2200"/>
+                <a:spcPts val="2100"/>
               </a:lnSpc>
               <a:buNone/>
             </a:pPr>
             <a:r>
-              <a:rPr lang="en-US" sz="1550" dirty="0">
+              <a:rPr lang="en-US" sz="1300" b="1" spc="100" kern="0" dirty="0">
+                <a:solidFill>
+                  <a:srgbClr val="4A6B5D"/>
+                </a:solidFill>
+                <a:latin typeface="Arial" pitchFamily="34" charset="0"/>
+                <a:ea typeface="Arial" pitchFamily="34" charset="-122"/>
+                <a:cs typeface="Arial" pitchFamily="34" charset="-120"/>
+              </a:rPr>
+              <a:t>THE REFUSAL   </a:t>
+            </a:r>
+            <a:pPr indent="0" marL="0">
+              <a:lnSpc>
+                <a:spcPts val="2100"/>
+              </a:lnSpc>
+              <a:buNone/>
+            </a:pPr>
+            <a:r>
+              <a:rPr lang="en-US" sz="1500" dirty="0">
                 <a:solidFill>
                   <a:srgbClr val="24313F"/>
                 </a:solidFill>
@@ -2522,28 +2539,36 @@
                 <a:ea typeface="Georgia" pitchFamily="34" charset="-122"/>
                 <a:cs typeface="Georgia" pitchFamily="34" charset="-120"/>
               </a:rPr>
-              <a:t>Cahun shaves the head, wears the suit, plants a hand on the hip and stares the camera down: every convention of the looked-at woman refused in one frame, a century ago. The portrait does not offer itself; it examines you.</a:t>
-            </a:r>
-            <a:endParaRPr lang="en-US" sz="1550" dirty="0"/>
+              <a:t>Shaved head, a suit, a hand on the hip, a direct stare. Every convention of the looked-at woman is refused in one frame, a century ago.</a:t>
+            </a:r>
+            <a:endParaRPr lang="en-US" sz="1300" dirty="0"/>
           </a:p>
           <a:p>
             <a:pPr indent="0" marL="0">
               <a:lnSpc>
-                <a:spcPts val="2200"/>
+                <a:spcPts val="2100"/>
               </a:lnSpc>
               <a:buNone/>
             </a:pPr>
-            <a:endParaRPr lang="en-US" sz="1550" dirty="0"/>
-          </a:p>
-          <a:p>
+            <a:r>
+              <a:rPr lang="en-US" sz="1300" b="1" spc="100" kern="0" dirty="0">
+                <a:solidFill>
+                  <a:srgbClr val="4A6B5D"/>
+                </a:solidFill>
+                <a:latin typeface="Arial" pitchFamily="34" charset="0"/>
+                <a:ea typeface="Arial" pitchFamily="34" charset="-122"/>
+                <a:cs typeface="Arial" pitchFamily="34" charset="-120"/>
+              </a:rPr>
+              <a:t>KEY POINT   </a:t>
+            </a:r>
             <a:pPr indent="0" marL="0">
               <a:lnSpc>
-                <a:spcPts val="2200"/>
+                <a:spcPts val="2100"/>
               </a:lnSpc>
               <a:buNone/>
             </a:pPr>
             <a:r>
-              <a:rPr lang="en-US" sz="1550" dirty="0">
+              <a:rPr lang="en-US" sz="1500" dirty="0">
                 <a:solidFill>
                   <a:srgbClr val="24313F"/>
                 </a:solidFill>
@@ -2551,9 +2576,46 @@
                 <a:ea typeface="Georgia" pitchFamily="34" charset="-122"/>
                 <a:cs typeface="Georgia" pitchFamily="34" charset="-120"/>
               </a:rPr>
-              <a:t>That stare is the bridge to hooks: the gaze returned by someone the system never expected to look back. Ask of any text this week: who is allowed to look, who is looked at, and what happens when the assignment is refused?</a:t>
-            </a:r>
-            <a:endParaRPr lang="en-US" sz="1550" dirty="0"/>
+              <a:t>The portrait does not offer itself to you. It examines you.</a:t>
+            </a:r>
+            <a:endParaRPr lang="en-US" sz="1300" dirty="0"/>
+          </a:p>
+          <a:p>
+            <a:pPr indent="0" marL="0">
+              <a:lnSpc>
+                <a:spcPts val="2100"/>
+              </a:lnSpc>
+              <a:buNone/>
+            </a:pPr>
+            <a:r>
+              <a:rPr lang="en-US" sz="1300" b="1" spc="100" kern="0" dirty="0">
+                <a:solidFill>
+                  <a:srgbClr val="4A6B5D"/>
+                </a:solidFill>
+                <a:latin typeface="Arial" pitchFamily="34" charset="0"/>
+                <a:ea typeface="Arial" pitchFamily="34" charset="-122"/>
+                <a:cs typeface="Arial" pitchFamily="34" charset="-120"/>
+              </a:rPr>
+              <a:t>ASK   </a:t>
+            </a:r>
+            <a:pPr indent="0" marL="0">
+              <a:lnSpc>
+                <a:spcPts val="2100"/>
+              </a:lnSpc>
+              <a:buNone/>
+            </a:pPr>
+            <a:r>
+              <a:rPr lang="en-US" sz="1500" dirty="0">
+                <a:solidFill>
+                  <a:srgbClr val="24313F"/>
+                </a:solidFill>
+                <a:latin typeface="Georgia" pitchFamily="34" charset="0"/>
+                <a:ea typeface="Georgia" pitchFamily="34" charset="-122"/>
+                <a:cs typeface="Georgia" pitchFamily="34" charset="-120"/>
+              </a:rPr>
+              <a:t>In any text this week: who may look? Who is looked at? What happens when someone refuses the role?</a:t>
+            </a:r>
+            <a:endParaRPr lang="en-US" sz="1300" dirty="0"/>
           </a:p>
         </p:txBody>
       </p:sp>
@@ -2876,12 +2938,29 @@
           <a:p>
             <a:pPr indent="0" marL="0">
               <a:lnSpc>
-                <a:spcPts val="2800"/>
+                <a:spcPts val="2600"/>
               </a:lnSpc>
               <a:buNone/>
             </a:pPr>
             <a:r>
-              <a:rPr lang="en-US" sz="2000" dirty="0">
+              <a:rPr lang="en-US" sz="1600" b="1" spc="100" kern="0" dirty="0">
+                <a:solidFill>
+                  <a:srgbClr val="4A6B5D"/>
+                </a:solidFill>
+                <a:latin typeface="Arial" pitchFamily="34" charset="0"/>
+                <a:ea typeface="Arial" pitchFamily="34" charset="-122"/>
+                <a:cs typeface="Arial" pitchFamily="34" charset="-120"/>
+              </a:rPr>
+              <a:t>THE FLIP   </a:t>
+            </a:r>
+            <a:pPr indent="0" marL="0">
+              <a:lnSpc>
+                <a:spcPts val="2600"/>
+              </a:lnSpc>
+              <a:buNone/>
+            </a:pPr>
+            <a:r>
+              <a:rPr lang="en-US" sz="1800" dirty="0">
                 <a:solidFill>
                   <a:srgbClr val="24313F"/>
                 </a:solidFill>
@@ -2889,9 +2968,83 @@
                 <a:ea typeface="Georgia" pitchFamily="34" charset="-122"/>
                 <a:cs typeface="Georgia" pitchFamily="34" charset="-120"/>
               </a:rPr>
-              <a:t>bell hooks flips the week's question. Not how the text looks at its subjects, but who the looking was built for, and what happens when someone else does it. Refusing a text, and reading it again against itself, is critical work. The oppositional gaze looks back at a text that never expected you to be watching.</a:t>
-            </a:r>
-            <a:endParaRPr lang="en-US" sz="2000" dirty="0"/>
+              <a:t>bell hooks turns the question around. Not: how does the text look at its subjects? But: who was the looking built for?</a:t>
+            </a:r>
+            <a:endParaRPr lang="en-US" sz="1600" dirty="0"/>
+          </a:p>
+          <a:p>
+            <a:pPr indent="0" marL="0">
+              <a:lnSpc>
+                <a:spcPts val="2600"/>
+              </a:lnSpc>
+              <a:buNone/>
+            </a:pPr>
+            <a:r>
+              <a:rPr lang="en-US" sz="1600" b="1" spc="100" kern="0" dirty="0">
+                <a:solidFill>
+                  <a:srgbClr val="4A6B5D"/>
+                </a:solidFill>
+                <a:latin typeface="Arial" pitchFamily="34" charset="0"/>
+                <a:ea typeface="Arial" pitchFamily="34" charset="-122"/>
+                <a:cs typeface="Arial" pitchFamily="34" charset="-120"/>
+              </a:rPr>
+              <a:t>TERM   </a:t>
+            </a:r>
+            <a:pPr indent="0" marL="0">
+              <a:lnSpc>
+                <a:spcPts val="2600"/>
+              </a:lnSpc>
+              <a:buNone/>
+            </a:pPr>
+            <a:r>
+              <a:rPr lang="en-US" sz="1800" dirty="0">
+                <a:solidFill>
+                  <a:srgbClr val="24313F"/>
+                </a:solidFill>
+                <a:latin typeface="Georgia" pitchFamily="34" charset="0"/>
+                <a:ea typeface="Georgia" pitchFamily="34" charset="-122"/>
+                <a:cs typeface="Georgia" pitchFamily="34" charset="-120"/>
+              </a:rPr>
+              <a:t>The oppositional gaze: looking back, critically, at a text that never expected you to be watching.</a:t>
+            </a:r>
+            <a:endParaRPr lang="en-US" sz="1600" dirty="0"/>
+          </a:p>
+          <a:p>
+            <a:pPr indent="0" marL="0">
+              <a:lnSpc>
+                <a:spcPts val="2600"/>
+              </a:lnSpc>
+              <a:buNone/>
+            </a:pPr>
+            <a:r>
+              <a:rPr lang="en-US" sz="1600" b="1" spc="100" kern="0" dirty="0">
+                <a:solidFill>
+                  <a:srgbClr val="4A6B5D"/>
+                </a:solidFill>
+                <a:latin typeface="Arial" pitchFamily="34" charset="0"/>
+                <a:ea typeface="Arial" pitchFamily="34" charset="-122"/>
+                <a:cs typeface="Arial" pitchFamily="34" charset="-120"/>
+              </a:rPr>
+              <a:t>KEY POINT   </a:t>
+            </a:r>
+            <a:pPr indent="0" marL="0">
+              <a:lnSpc>
+                <a:spcPts val="2600"/>
+              </a:lnSpc>
+              <a:buNone/>
+            </a:pPr>
+            <a:r>
+              <a:rPr lang="en-US" sz="1800" dirty="0">
+                <a:solidFill>
+                  <a:srgbClr val="24313F"/>
+                </a:solidFill>
+                <a:latin typeface="Georgia" pitchFamily="34" charset="0"/>
+                <a:ea typeface="Georgia" pitchFamily="34" charset="-122"/>
+                <a:cs typeface="Georgia" pitchFamily="34" charset="-120"/>
+              </a:rPr>
+              <a:t>Refusing a text, and reading it against itself, is critical work. It earns marks.</a:t>
+            </a:r>
+            <a:endParaRPr lang="en-US" sz="1600" dirty="0"/>
           </a:p>
         </p:txBody>
       </p:sp>
@@ -3200,7 +3353,7 @@
         <p:spPr>
           <a:xfrm>
             <a:off x="822960" y="2743200"/>
-            <a:ext cx="9875520" cy="1828800"/>
+            <a:ext cx="9875520" cy="1920240"/>
           </a:xfrm>
           <a:prstGeom prst="rect">
             <a:avLst/>
@@ -3214,12 +3367,29 @@
           <a:p>
             <a:pPr indent="0" marL="0">
               <a:lnSpc>
-                <a:spcPts val="2800"/>
+                <a:spcPts val="2600"/>
               </a:lnSpc>
               <a:buNone/>
             </a:pPr>
             <a:r>
-              <a:rPr lang="en-US" sz="2000" dirty="0">
+              <a:rPr lang="en-US" sz="1600" b="1" spc="100" kern="0" dirty="0">
+                <a:solidFill>
+                  <a:srgbClr val="4A6B5D"/>
+                </a:solidFill>
+                <a:latin typeface="Arial" pitchFamily="34" charset="0"/>
+                <a:ea typeface="Arial" pitchFamily="34" charset="-122"/>
+                <a:cs typeface="Arial" pitchFamily="34" charset="-120"/>
+              </a:rPr>
+              <a:t>TASK   </a:t>
+            </a:r>
+            <a:pPr indent="0" marL="0">
+              <a:lnSpc>
+                <a:spcPts val="2600"/>
+              </a:lnSpc>
+              <a:buNone/>
+            </a:pPr>
+            <a:r>
+              <a:rPr lang="en-US" sz="1800" dirty="0">
                 <a:solidFill>
                   <a:srgbClr val="24313F"/>
                 </a:solidFill>
@@ -3227,93 +3397,185 @@
                 <a:ea typeface="Georgia" pitchFamily="34" charset="-122"/>
                 <a:cs typeface="Georgia" pitchFamily="34" charset="-120"/>
               </a:rPr>
-              <a:t>One close-reading paragraph on a still or short clip: a claim, evidence, and a theorist working inside the analysis. As Mulvey's camera-look predicts... beats Mulvey said the male gaze. The theorist earns their place by doing work, not by being named.</a:t>
-            </a:r>
-            <a:endParaRPr lang="en-US" sz="2000" dirty="0"/>
-          </a:p>
-        </p:txBody>
-      </p:sp>
-      <p:sp>
-        <p:nvSpPr>
-          <p:cNvPr id="8" name="Text 6"/>
-          <p:cNvSpPr/>
-          <p:nvPr/>
-        </p:nvSpPr>
-        <p:spPr>
-          <a:xfrm>
-            <a:off x="822960" y="4846320"/>
-            <a:ext cx="9875520" cy="365760"/>
-          </a:xfrm>
-          <a:prstGeom prst="rect">
-            <a:avLst/>
-          </a:prstGeom>
-          <a:noFill/>
-          <a:ln/>
-        </p:spPr>
-        <p:txBody>
-          <a:bodyPr wrap="square" lIns="0" tIns="0" rIns="0" bIns="0" rtlCol="0" anchor="ctr"/>
-          <a:lstStyle/>
-          <a:p>
-            <a:pPr indent="0" marL="0">
-              <a:buNone/>
-            </a:pPr>
-            <a:r>
-              <a:rPr lang="en-US" sz="1250" i="1" dirty="0">
-                <a:solidFill>
-                  <a:srgbClr val="7A7F72"/>
+              <a:t>One close-reading paragraph on a still or short clip: a claim, evidence, and a theorist doing work inside the analysis.</a:t>
+            </a:r>
+            <a:endParaRPr lang="en-US" sz="1600" dirty="0"/>
+          </a:p>
+          <a:p>
+            <a:pPr indent="0" marL="0">
+              <a:lnSpc>
+                <a:spcPts val="2600"/>
+              </a:lnSpc>
+              <a:buNone/>
+            </a:pPr>
+            <a:r>
+              <a:rPr lang="en-US" sz="1600" b="1" spc="100" kern="0" dirty="0">
+                <a:solidFill>
+                  <a:srgbClr val="4A6B5D"/>
                 </a:solidFill>
                 <a:latin typeface="Arial" pitchFamily="34" charset="0"/>
                 <a:ea typeface="Arial" pitchFamily="34" charset="-122"/>
                 <a:cs typeface="Arial" pitchFamily="34" charset="-120"/>
               </a:rPr>
-              <a:t>Before scripts come in, a Smuggler Hunt: partners hunt for a decorated theorist, named but doing no work.</a:t>
-            </a:r>
-            <a:endParaRPr lang="en-US" sz="1250" dirty="0"/>
-          </a:p>
-        </p:txBody>
-      </p:sp>
-      <p:sp>
-        <p:nvSpPr>
-          <p:cNvPr id="9" name="Text 7"/>
-          <p:cNvSpPr/>
-          <p:nvPr/>
-        </p:nvSpPr>
-        <p:spPr>
-          <a:xfrm>
-            <a:off x="822960" y="5257800"/>
-            <a:ext cx="9875520" cy="457200"/>
-          </a:xfrm>
-          <a:prstGeom prst="rect">
-            <a:avLst/>
-          </a:prstGeom>
-          <a:noFill/>
-          <a:ln/>
-        </p:spPr>
-        <p:txBody>
-          <a:bodyPr wrap="square" lIns="0" tIns="0" rIns="0" bIns="0" rtlCol="0" anchor="ctr"/>
-          <a:lstStyle/>
-          <a:p>
-            <a:pPr indent="0" marL="0">
-              <a:buNone/>
-            </a:pPr>
-            <a:r>
-              <a:rPr lang="en-US" sz="1300" i="1" dirty="0">
-                <a:solidFill>
-                  <a:srgbClr val="7A7F72"/>
+              <a:t>MODEL   </a:t>
+            </a:r>
+            <a:pPr indent="0" marL="0">
+              <a:lnSpc>
+                <a:spcPts val="2600"/>
+              </a:lnSpc>
+              <a:buNone/>
+            </a:pPr>
+            <a:r>
+              <a:rPr lang="en-US" sz="1800" dirty="0">
+                <a:solidFill>
+                  <a:srgbClr val="24313F"/>
+                </a:solidFill>
+                <a:latin typeface="Georgia" pitchFamily="34" charset="0"/>
+                <a:ea typeface="Georgia" pitchFamily="34" charset="-122"/>
+                <a:cs typeface="Georgia" pitchFamily="34" charset="-120"/>
+              </a:rPr>
+              <a:t>“As Mulvey's camera-look predicts ...” beats “Mulvey said the male gaze.”</a:t>
+            </a:r>
+            <a:endParaRPr lang="en-US" sz="1600" dirty="0"/>
+          </a:p>
+          <a:p>
+            <a:pPr indent="0" marL="0">
+              <a:lnSpc>
+                <a:spcPts val="2600"/>
+              </a:lnSpc>
+              <a:buNone/>
+            </a:pPr>
+            <a:r>
+              <a:rPr lang="en-US" sz="1600" b="1" spc="100" kern="0" dirty="0">
+                <a:solidFill>
+                  <a:srgbClr val="4A6B5D"/>
                 </a:solidFill>
                 <a:latin typeface="Arial" pitchFamily="34" charset="0"/>
                 <a:ea typeface="Arial" pitchFamily="34" charset="-122"/>
                 <a:cs typeface="Arial" pitchFamily="34" charset="-120"/>
               </a:rPr>
-              <a:t>A3 announced today: the complete C1 portfolio, due Friday 27 November, exactly 14 days.</a:t>
-            </a:r>
-            <a:endParaRPr lang="en-US" sz="1300" dirty="0"/>
-          </a:p>
-        </p:txBody>
-      </p:sp>
-      <p:sp>
-        <p:nvSpPr>
-          <p:cNvPr id="10" name="Shape 8"/>
+              <a:t>RULE   </a:t>
+            </a:r>
+            <a:pPr indent="0" marL="0">
+              <a:lnSpc>
+                <a:spcPts val="2600"/>
+              </a:lnSpc>
+              <a:buNone/>
+            </a:pPr>
+            <a:r>
+              <a:rPr lang="en-US" sz="1800" dirty="0">
+                <a:solidFill>
+                  <a:srgbClr val="24313F"/>
+                </a:solidFill>
+                <a:latin typeface="Georgia" pitchFamily="34" charset="0"/>
+                <a:ea typeface="Georgia" pitchFamily="34" charset="-122"/>
+                <a:cs typeface="Georgia" pitchFamily="34" charset="-120"/>
+              </a:rPr>
+              <a:t>A theorist earns their place by doing work, not by being named.</a:t>
+            </a:r>
+            <a:endParaRPr lang="en-US" sz="1600" dirty="0"/>
+          </a:p>
+        </p:txBody>
+      </p:sp>
+      <p:sp>
+        <p:nvSpPr>
+          <p:cNvPr id="8" name="Text 6"/>
+          <p:cNvSpPr/>
+          <p:nvPr/>
+        </p:nvSpPr>
+        <p:spPr>
+          <a:xfrm>
+            <a:off x="822960" y="4892040"/>
+            <a:ext cx="9875520" cy="594360"/>
+          </a:xfrm>
+          <a:prstGeom prst="rect">
+            <a:avLst/>
+          </a:prstGeom>
+          <a:noFill/>
+          <a:ln/>
+        </p:spPr>
+        <p:txBody>
+          <a:bodyPr wrap="square" lIns="0" tIns="0" rIns="0" bIns="0" rtlCol="0" anchor="t"/>
+          <a:lstStyle/>
+          <a:p>
+            <a:pPr indent="0" marL="0">
+              <a:lnSpc>
+                <a:spcPts val="1700"/>
+              </a:lnSpc>
+              <a:buNone/>
+            </a:pPr>
+            <a:r>
+              <a:rPr lang="en-US" sz="1050" b="1" spc="100" kern="0" dirty="0">
+                <a:solidFill>
+                  <a:srgbClr val="7A7F72"/>
+                </a:solidFill>
+                <a:latin typeface="Arial" pitchFamily="34" charset="0"/>
+                <a:ea typeface="Arial" pitchFamily="34" charset="-122"/>
+                <a:cs typeface="Arial" pitchFamily="34" charset="-120"/>
+              </a:rPr>
+              <a:t>THE HUNT   </a:t>
+            </a:r>
+            <a:pPr indent="0" marL="0">
+              <a:lnSpc>
+                <a:spcPts val="1700"/>
+              </a:lnSpc>
+              <a:buNone/>
+            </a:pPr>
+            <a:r>
+              <a:rPr lang="en-US" sz="1250" dirty="0">
+                <a:solidFill>
+                  <a:srgbClr val="7A7F72"/>
+                </a:solidFill>
+                <a:latin typeface="Georgia" pitchFamily="34" charset="0"/>
+                <a:ea typeface="Georgia" pitchFamily="34" charset="-122"/>
+                <a:cs typeface="Georgia" pitchFamily="34" charset="-120"/>
+              </a:rPr>
+              <a:t>Before you hand it in, partners hunt for a decorated theorist: named, but doing no work.</a:t>
+            </a:r>
+            <a:endParaRPr lang="en-US" sz="1050" dirty="0"/>
+          </a:p>
+          <a:p>
+            <a:pPr indent="0" marL="0">
+              <a:lnSpc>
+                <a:spcPts val="1700"/>
+              </a:lnSpc>
+              <a:buNone/>
+            </a:pPr>
+            <a:r>
+              <a:rPr lang="en-US" sz="1050" b="1" spc="100" kern="0" dirty="0">
+                <a:solidFill>
+                  <a:srgbClr val="7A7F72"/>
+                </a:solidFill>
+                <a:latin typeface="Arial" pitchFamily="34" charset="0"/>
+                <a:ea typeface="Arial" pitchFamily="34" charset="-122"/>
+                <a:cs typeface="Arial" pitchFamily="34" charset="-120"/>
+              </a:rPr>
+              <a:t>A3 ANNOUNCED   </a:t>
+            </a:r>
+            <a:pPr indent="0" marL="0">
+              <a:lnSpc>
+                <a:spcPts val="1700"/>
+              </a:lnSpc>
+              <a:buNone/>
+            </a:pPr>
+            <a:r>
+              <a:rPr lang="en-US" sz="1250" dirty="0">
+                <a:solidFill>
+                  <a:srgbClr val="7A7F72"/>
+                </a:solidFill>
+                <a:latin typeface="Georgia" pitchFamily="34" charset="0"/>
+                <a:ea typeface="Georgia" pitchFamily="34" charset="-122"/>
+                <a:cs typeface="Georgia" pitchFamily="34" charset="-120"/>
+              </a:rPr>
+              <a:t>The complete Component 1 portfolio, due Friday 27 November: exactly 14 days from today.</a:t>
+            </a:r>
+            <a:endParaRPr lang="en-US" sz="1050" dirty="0"/>
+          </a:p>
+        </p:txBody>
+      </p:sp>
+      <p:sp>
+        <p:nvSpPr>
+          <p:cNvPr id="9" name="Shape 7"/>
           <p:cNvSpPr/>
           <p:nvPr/>
         </p:nvSpPr>
@@ -3336,7 +3598,7 @@
       </p:sp>
       <p:sp>
         <p:nvSpPr>
-          <p:cNvPr id="11" name="Text 9"/>
+          <p:cNvPr id="10" name="Text 8"/>
           <p:cNvSpPr/>
           <p:nvPr/>
         </p:nvSpPr>
@@ -3375,7 +3637,7 @@
       </p:sp>
       <p:sp>
         <p:nvSpPr>
-          <p:cNvPr id="12" name="Text 10"/>
+          <p:cNvPr id="11" name="Text 9"/>
           <p:cNvSpPr/>
           <p:nvPr/>
         </p:nvSpPr>
@@ -3877,7 +4139,7 @@
                 <a:ea typeface="Georgia" pitchFamily="34" charset="-122"/>
                 <a:cs typeface="Georgia" pitchFamily="34" charset="-120"/>
               </a:rPr>
-              <a:t>Who is the looking</a:t>
+              <a:t>Who was this looking</a:t>
             </a:r>
             <a:endParaRPr lang="en-US" sz="5000" dirty="0"/>
           </a:p>
@@ -3897,7 +4159,7 @@
                 <a:ea typeface="Georgia" pitchFamily="34" charset="-122"/>
                 <a:cs typeface="Georgia" pitchFamily="34" charset="-120"/>
               </a:rPr>
-              <a:t>arranged for?</a:t>
+              <a:t>built for?</a:t>
             </a:r>
             <a:endParaRPr lang="en-US" sz="5000" dirty="0"/>
           </a:p>
@@ -4069,7 +4331,7 @@
                 <a:ea typeface="Georgia" pitchFamily="34" charset="-122"/>
                 <a:cs typeface="Georgia" pitchFamily="34" charset="-120"/>
               </a:rPr>
-              <a:t>If it is assembled, it can be assembled otherwise</a:t>
+              <a:t>If it is built, it can be built differently</a:t>
             </a:r>
             <a:endParaRPr lang="en-US" sz="2800" dirty="0"/>
           </a:p>
@@ -4565,23 +4827,26 @@
         <p:spPr>
           <a:xfrm>
             <a:off x="822960" y="5212080"/>
-            <a:ext cx="10058400" cy="457200"/>
-          </a:xfrm>
-          <a:prstGeom prst="rect">
-            <a:avLst/>
-          </a:prstGeom>
-          <a:noFill/>
-          <a:ln/>
-        </p:spPr>
-        <p:txBody>
-          <a:bodyPr wrap="square" lIns="0" tIns="0" rIns="0" bIns="0" rtlCol="0" anchor="ctr"/>
-          <a:lstStyle/>
-          <a:p>
-            <a:pPr indent="0" marL="0">
-              <a:buNone/>
-            </a:pPr>
-            <a:r>
-              <a:rPr lang="en-US" sz="1250" i="1" dirty="0">
+            <a:ext cx="10058400" cy="320040"/>
+          </a:xfrm>
+          <a:prstGeom prst="rect">
+            <a:avLst/>
+          </a:prstGeom>
+          <a:noFill/>
+          <a:ln/>
+        </p:spPr>
+        <p:txBody>
+          <a:bodyPr wrap="square" lIns="0" tIns="0" rIns="0" bIns="0" rtlCol="0" anchor="t"/>
+          <a:lstStyle/>
+          <a:p>
+            <a:pPr indent="0" marL="0">
+              <a:lnSpc>
+                <a:spcPts val="1700"/>
+              </a:lnSpc>
+              <a:buNone/>
+            </a:pPr>
+            <a:r>
+              <a:rPr lang="en-US" sz="1050" b="1" spc="100" kern="0" dirty="0">
                 <a:solidFill>
                   <a:srgbClr val="7A7F72"/>
                 </a:solidFill>
@@ -4589,9 +4854,26 @@
                 <a:ea typeface="Arial" pitchFamily="34" charset="-122"/>
                 <a:cs typeface="Arial" pitchFamily="34" charset="-120"/>
               </a:rPr>
-              <a:t>Swap the conventions between two ads on paper: what breaks, and why does the break feel like information?</a:t>
-            </a:r>
-            <a:endParaRPr lang="en-US" sz="1250" dirty="0"/>
+              <a:t>TASK   </a:t>
+            </a:r>
+            <a:pPr indent="0" marL="0">
+              <a:lnSpc>
+                <a:spcPts val="1700"/>
+              </a:lnSpc>
+              <a:buNone/>
+            </a:pPr>
+            <a:r>
+              <a:rPr lang="en-US" sz="1250" dirty="0">
+                <a:solidFill>
+                  <a:srgbClr val="7A7F72"/>
+                </a:solidFill>
+                <a:latin typeface="Georgia" pitchFamily="34" charset="0"/>
+                <a:ea typeface="Georgia" pitchFamily="34" charset="-122"/>
+                <a:cs typeface="Georgia" pitchFamily="34" charset="-120"/>
+              </a:rPr>
+              <a:t>Swap the conventions between two ads on paper. What breaks? Why does the break tell you something?</a:t>
+            </a:r>
+            <a:endParaRPr lang="en-US" sz="1050" dirty="0"/>
           </a:p>
         </p:txBody>
       </p:sp>
@@ -5080,7 +5362,7 @@
                 <a:ea typeface="Georgia" pitchFamily="34" charset="-122"/>
                 <a:cs typeface="Georgia" pitchFamily="34" charset="-120"/>
               </a:rPr>
-              <a:t>offered stillness against restless motion</a:t>
+              <a:t>She holds a pose to be seen. He moves.</a:t>
             </a:r>
             <a:endParaRPr lang="en-US" sz="1300" dirty="0"/>
           </a:p>
@@ -5161,7 +5443,7 @@
                 <a:ea typeface="Georgia" pitchFamily="34" charset="-122"/>
                 <a:cs typeface="Georgia" pitchFamily="34" charset="-120"/>
               </a:rPr>
-              <a:t>sent past us; sent straight at us</a:t>
+              <a:t>Her eyes go past us. His meet ours.</a:t>
             </a:r>
             <a:endParaRPr lang="en-US" sz="1300" dirty="0"/>
           </a:p>
@@ -5242,7 +5524,7 @@
                 <a:ea typeface="Georgia" pitchFamily="34" charset="-122"/>
                 <a:cs typeface="Georgia" pitchFamily="34" charset="-120"/>
               </a:rPr>
-              <a:t>the dress is the body; the face is the man</a:t>
+              <a:t>The dress is the body; the face is the man.</a:t>
             </a:r>
             <a:endParaRPr lang="en-US" sz="1300" dirty="0"/>
           </a:p>
@@ -5323,7 +5605,7 @@
                 <a:ea typeface="Georgia" pitchFamily="34" charset="-122"/>
                 <a:cs typeface="Georgia" pitchFamily="34" charset="-120"/>
               </a:rPr>
-              <a:t>golden sea against burnt desert</a:t>
+              <a:t>Golden sea against burnt desert.</a:t>
             </a:r>
             <a:endParaRPr lang="en-US" sz="1300" dirty="0"/>
           </a:p>
@@ -6188,7 +6470,7 @@
                 <a:ea typeface="Georgia" pitchFamily="34" charset="-122"/>
                 <a:cs typeface="Georgia" pitchFamily="34" charset="-120"/>
               </a:rPr>
-              <a:t>How we are positioned to look, and whose looking we are lent.</a:t>
+              <a:t>How we are positioned to look, and whose view we are given.</a:t>
             </a:r>
             <a:endParaRPr lang="en-US" sz="1450" dirty="0"/>
           </a:p>
@@ -6269,23 +6551,26 @@
         <p:spPr>
           <a:xfrm>
             <a:off x="822960" y="5806440"/>
-            <a:ext cx="10543032" cy="457200"/>
-          </a:xfrm>
-          <a:prstGeom prst="rect">
-            <a:avLst/>
-          </a:prstGeom>
-          <a:noFill/>
-          <a:ln/>
-        </p:spPr>
-        <p:txBody>
-          <a:bodyPr wrap="square" lIns="0" tIns="0" rIns="0" bIns="0" rtlCol="0" anchor="ctr"/>
-          <a:lstStyle/>
-          <a:p>
-            <a:pPr indent="0" marL="0">
-              <a:buNone/>
-            </a:pPr>
-            <a:r>
-              <a:rPr lang="en-US" sz="1250" i="1" dirty="0">
+            <a:ext cx="10543032" cy="320040"/>
+          </a:xfrm>
+          <a:prstGeom prst="rect">
+            <a:avLst/>
+          </a:prstGeom>
+          <a:noFill/>
+          <a:ln/>
+        </p:spPr>
+        <p:txBody>
+          <a:bodyPr wrap="square" lIns="0" tIns="0" rIns="0" bIns="0" rtlCol="0" anchor="t"/>
+          <a:lstStyle/>
+          <a:p>
+            <a:pPr indent="0" marL="0">
+              <a:lnSpc>
+                <a:spcPts val="1700"/>
+              </a:lnSpc>
+              <a:buNone/>
+            </a:pPr>
+            <a:r>
+              <a:rPr lang="en-US" sz="1050" b="1" spc="100" kern="0" dirty="0">
                 <a:solidFill>
                   <a:srgbClr val="7A7F72"/>
                 </a:solidFill>
@@ -6293,9 +6578,26 @@
                 <a:ea typeface="Arial" pitchFamily="34" charset="-122"/>
                 <a:cs typeface="Arial" pitchFamily="34" charset="-120"/>
               </a:rPr>
-              <a:t>Classically, all three align on woman as spectacle. This is a claim from 1975 about a system, made to be tested, not recited.</a:t>
-            </a:r>
-            <a:endParaRPr lang="en-US" sz="1250" dirty="0"/>
+              <a:t>THE CLAIM   </a:t>
+            </a:r>
+            <a:pPr indent="0" marL="0">
+              <a:lnSpc>
+                <a:spcPts val="1700"/>
+              </a:lnSpc>
+              <a:buNone/>
+            </a:pPr>
+            <a:r>
+              <a:rPr lang="en-US" sz="1250" dirty="0">
+                <a:solidFill>
+                  <a:srgbClr val="7A7F72"/>
+                </a:solidFill>
+                <a:latin typeface="Georgia" pitchFamily="34" charset="0"/>
+                <a:ea typeface="Georgia" pitchFamily="34" charset="-122"/>
+                <a:cs typeface="Georgia" pitchFamily="34" charset="-120"/>
+              </a:rPr>
+              <a:t>In classic Hollywood, all three looks align on the woman as spectacle. A 1975 claim about a system: test it, do not just recite it.</a:t>
+            </a:r>
+            <a:endParaRPr lang="en-US" sz="1050" dirty="0"/>
           </a:p>
         </p:txBody>
       </p:sp>
@@ -6575,6 +6877,65 @@
           </a:p>
         </p:txBody>
       </p:sp>
+      <p:sp>
+        <p:nvSpPr>
+          <p:cNvPr id="6" name="Text 4"/>
+          <p:cNvSpPr/>
+          <p:nvPr/>
+        </p:nvSpPr>
+        <p:spPr>
+          <a:xfrm>
+            <a:off x="822960" y="5806440"/>
+            <a:ext cx="10424160" cy="640080"/>
+          </a:xfrm>
+          <a:prstGeom prst="rect">
+            <a:avLst/>
+          </a:prstGeom>
+          <a:noFill/>
+          <a:ln/>
+        </p:spPr>
+        <p:txBody>
+          <a:bodyPr wrap="square" lIns="0" tIns="0" rIns="0" bIns="0" rtlCol="0" anchor="t"/>
+          <a:lstStyle/>
+          <a:p>
+            <a:pPr indent="0" marL="0">
+              <a:lnSpc>
+                <a:spcPts val="1900"/>
+              </a:lnSpc>
+              <a:buNone/>
+            </a:pPr>
+            <a:r>
+              <a:rPr lang="en-US" sz="1200" b="1" spc="100" kern="0" dirty="0">
+                <a:solidFill>
+                  <a:srgbClr val="7A7F72"/>
+                </a:solidFill>
+                <a:latin typeface="Arial" pitchFamily="34" charset="0"/>
+                <a:ea typeface="Arial" pitchFamily="34" charset="-122"/>
+                <a:cs typeface="Arial" pitchFamily="34" charset="-120"/>
+              </a:rPr>
+              <a:t>IN PLAIN WORDS   </a:t>
+            </a:r>
+            <a:pPr indent="0" marL="0">
+              <a:lnSpc>
+                <a:spcPts val="1900"/>
+              </a:lnSpc>
+              <a:buNone/>
+            </a:pPr>
+            <a:r>
+              <a:rPr lang="en-US" sz="1400" i="1" dirty="0">
+                <a:solidFill>
+                  <a:srgbClr val="4A6B5D"/>
+                </a:solidFill>
+                <a:latin typeface="Georgia" pitchFamily="34" charset="0"/>
+                <a:ea typeface="Georgia" pitchFamily="34" charset="-122"/>
+                <a:cs typeface="Georgia" pitchFamily="34" charset="-120"/>
+              </a:rPr>
+              <a:t>In these films, women are arranged on screen to be looked at. Being looked at becomes their role.</a:t>
+            </a:r>
+            <a:endParaRPr lang="en-US" sz="1200" dirty="0"/>
+          </a:p>
+        </p:txBody>
+      </p:sp>
     </p:spTree>
   </p:cSld>
   <p:clrMapOvr>
@@ -6793,12 +7154,29 @@
           <a:p>
             <a:pPr indent="0" marL="0">
               <a:lnSpc>
-                <a:spcPts val="2300"/>
+                <a:spcPts val="2200"/>
               </a:lnSpc>
               <a:buNone/>
             </a:pPr>
             <a:r>
-              <a:rPr lang="en-US" sz="1600" dirty="0">
+              <a:rPr lang="en-US" sz="1350" b="1" spc="100" kern="0" dirty="0">
+                <a:solidFill>
+                  <a:srgbClr val="4A6B5D"/>
+                </a:solidFill>
+                <a:latin typeface="Arial" pitchFamily="34" charset="0"/>
+                <a:ea typeface="Arial" pitchFamily="34" charset="-122"/>
+                <a:cs typeface="Arial" pitchFamily="34" charset="-120"/>
+              </a:rPr>
+              <a:t>TASK   </a:t>
+            </a:r>
+            <a:pPr indent="0" marL="0">
+              <a:lnSpc>
+                <a:spcPts val="2200"/>
+              </a:lnSpc>
+              <a:buNone/>
+            </a:pPr>
+            <a:r>
+              <a:rPr lang="en-US" sz="1550" dirty="0">
                 <a:solidFill>
                   <a:srgbClr val="24313F"/>
                 </a:solidFill>
@@ -6806,9 +7184,83 @@
                 <a:ea typeface="Georgia" pitchFamily="34" charset="-122"/>
                 <a:cs typeface="Georgia" pitchFamily="34" charset="-120"/>
               </a:rPr>
-              <a:t>Take a genre pair, one text before 2000 and one after 2018, with a comparable scene function so the only variable is era. Gather timecoded evidence for the camera-look, the character-look, and audience positioning in each. Then reach a verdict with the evidence attached: did the gaze hold, shift, or turn out to be the same structure pointed elsewhere?</a:t>
-            </a:r>
-            <a:endParaRPr lang="en-US" sz="1600" dirty="0"/>
+              <a:t>Take one genre pair: a text before 2000, a text after 2018, with a similar scene. The only variable is the era.</a:t>
+            </a:r>
+            <a:endParaRPr lang="en-US" sz="1350" dirty="0"/>
+          </a:p>
+          <a:p>
+            <a:pPr indent="0" marL="0">
+              <a:lnSpc>
+                <a:spcPts val="2200"/>
+              </a:lnSpc>
+              <a:buNone/>
+            </a:pPr>
+            <a:r>
+              <a:rPr lang="en-US" sz="1350" b="1" spc="100" kern="0" dirty="0">
+                <a:solidFill>
+                  <a:srgbClr val="4A6B5D"/>
+                </a:solidFill>
+                <a:latin typeface="Arial" pitchFamily="34" charset="0"/>
+                <a:ea typeface="Arial" pitchFamily="34" charset="-122"/>
+                <a:cs typeface="Arial" pitchFamily="34" charset="-120"/>
+              </a:rPr>
+              <a:t>EVIDENCE   </a:t>
+            </a:r>
+            <a:pPr indent="0" marL="0">
+              <a:lnSpc>
+                <a:spcPts val="2200"/>
+              </a:lnSpc>
+              <a:buNone/>
+            </a:pPr>
+            <a:r>
+              <a:rPr lang="en-US" sz="1550" dirty="0">
+                <a:solidFill>
+                  <a:srgbClr val="24313F"/>
+                </a:solidFill>
+                <a:latin typeface="Georgia" pitchFamily="34" charset="0"/>
+                <a:ea typeface="Georgia" pitchFamily="34" charset="-122"/>
+                <a:cs typeface="Georgia" pitchFamily="34" charset="-120"/>
+              </a:rPr>
+              <a:t>Timecode the camera-look, the character-look, and the audience position in each.</a:t>
+            </a:r>
+            <a:endParaRPr lang="en-US" sz="1350" dirty="0"/>
+          </a:p>
+          <a:p>
+            <a:pPr indent="0" marL="0">
+              <a:lnSpc>
+                <a:spcPts val="2200"/>
+              </a:lnSpc>
+              <a:buNone/>
+            </a:pPr>
+            <a:r>
+              <a:rPr lang="en-US" sz="1350" b="1" spc="100" kern="0" dirty="0">
+                <a:solidFill>
+                  <a:srgbClr val="4A6B5D"/>
+                </a:solidFill>
+                <a:latin typeface="Arial" pitchFamily="34" charset="0"/>
+                <a:ea typeface="Arial" pitchFamily="34" charset="-122"/>
+                <a:cs typeface="Arial" pitchFamily="34" charset="-120"/>
+              </a:rPr>
+              <a:t>VERDICT   </a:t>
+            </a:r>
+            <a:pPr indent="0" marL="0">
+              <a:lnSpc>
+                <a:spcPts val="2200"/>
+              </a:lnSpc>
+              <a:buNone/>
+            </a:pPr>
+            <a:r>
+              <a:rPr lang="en-US" sz="1550" dirty="0">
+                <a:solidFill>
+                  <a:srgbClr val="24313F"/>
+                </a:solidFill>
+                <a:latin typeface="Georgia" pitchFamily="34" charset="0"/>
+                <a:ea typeface="Georgia" pitchFamily="34" charset="-122"/>
+                <a:cs typeface="Georgia" pitchFamily="34" charset="-120"/>
+              </a:rPr>
+              <a:t>Did the gaze hold, shift, or invert? Attach the evidence to your answer.</a:t>
+            </a:r>
+            <a:endParaRPr lang="en-US" sz="1350" dirty="0"/>
           </a:p>
         </p:txBody>
       </p:sp>
@@ -6840,7 +7292,7 @@
               <a:buNone/>
             </a:pPr>
             <a:r>
-              <a:rPr lang="en-US" sz="1200" i="1" dirty="0">
+              <a:rPr lang="en-US" sz="1000" b="1" spc="100" kern="0" dirty="0">
                 <a:solidFill>
                   <a:srgbClr val="7A7F72"/>
                 </a:solidFill>
@@ -6848,9 +7300,26 @@
                 <a:ea typeface="Arial" pitchFamily="34" charset="-122"/>
                 <a:cs typeface="Arial" pitchFamily="34" charset="-120"/>
               </a:rPr>
-              <a:t>Every verdict must survive one structured counter: challenger named in advance, evidence required.</a:t>
-            </a:r>
-            <a:endParaRPr lang="en-US" sz="1200" dirty="0"/>
+              <a:t>THE COUNTER   </a:t>
+            </a:r>
+            <a:pPr indent="0" marL="0">
+              <a:lnSpc>
+                <a:spcPts val="1600"/>
+              </a:lnSpc>
+              <a:buNone/>
+            </a:pPr>
+            <a:r>
+              <a:rPr lang="en-US" sz="1200" dirty="0">
+                <a:solidFill>
+                  <a:srgbClr val="7A7F72"/>
+                </a:solidFill>
+                <a:latin typeface="Georgia" pitchFamily="34" charset="0"/>
+                <a:ea typeface="Georgia" pitchFamily="34" charset="-122"/>
+                <a:cs typeface="Georgia" pitchFamily="34" charset="-120"/>
+              </a:rPr>
+              <a:t>Every verdict faces one challenge, with evidence. The challenger is named in advance.</a:t>
+            </a:r>
+            <a:endParaRPr lang="en-US" sz="1000" dirty="0"/>
           </a:p>
         </p:txBody>
       </p:sp>

--- a/content/decks/media-studies/media-studies-s1-lesson-12-the-gaze.pptx
+++ b/content/decks/media-studies/media-studies-s1-lesson-12-the-gaze.pptx
@@ -514,7 +514,7 @@
           <a:p>
             <a:r>
               <a:rPr lang="en-US" dirty="0"/>
-              <a:t>The block builds van Zoonen and Mulvey; the double stress-tests Mulvey; hooks reframes the whole week. Homework issued Tuesday: the hooks extract, 300 to 400 words, glossed, EN with ZH support, read before Friday.</a:t>
+              <a:t>The block builds van Zoonen and Mulvey; the double stress-tests Mulvey; hooks reframes the whole week. Homework issued Wednesday: the hooks extract, 300 to 400 words, glossed, EN with ZH support, read before Friday.</a:t>
             </a:r>
             <a:endParaRPr lang="en-US" dirty="0"/>
           </a:p>
@@ -690,7 +690,7 @@
           <a:p>
             <a:r>
               <a:rPr lang="en-US" dirty="0"/>
-              <a:t>Taught from the read extract (300 to 400 words, glossed, EN with ZH support, issued Tuesday). Daughters of the Dust (1991) is hooks's own screen example if the room wants a text; the reframe then runs on the week's own ads and clips.</a:t>
+              <a:t>Taught from the read extract (300 to 400 words, glossed, EN with ZH support, issued Wednesday). Daughters of the Dust (1991) is hooks's own screen example if the room wants a text; the reframe then runs on the week's own ads and clips.</a:t>
             </a:r>
             <a:endParaRPr lang="en-US" dirty="0"/>
           </a:p>
@@ -2155,7 +2155,7 @@
                 <a:ea typeface="Arial" pitchFamily="34" charset="-122"/>
                 <a:cs typeface="Arial" pitchFamily="34" charset="-120"/>
               </a:rPr>
-              <a:t>Four days  ·  Mon 9 · Tue 10 · Wed 11 (double) · Fri 13 November</a:t>
+              <a:t>Four days  ·  Mon 9 · Wed 11 (double) · Thu 12 · Fri 13 November</a:t>
             </a:r>
             <a:endParaRPr lang="en-US" sz="1300" dirty="0"/>
           </a:p>
